--- a/thesis_defense/lifi_thesis_defense.pptx
+++ b/thesis_defense/lifi_thesis_defense.pptx
@@ -894,7 +894,7 @@
           <a:lstStyle/>
           <a:p>
             <a:r>
-              <a:t>State the measurement-provenance caveat proactively and plainly, in the same tone as every other sentence on this slide — don't let your delivery shift when you get to it. The frame-level parsing and crypto were always on-device; only the revocation decision (the Δ timer) was external at measurement time, mirroring the same logic that's now been moved on-device. If pressed: this was a deliberate sequencing choice — get clean, directly-instrumented protocol events first, then move the decision itself on-device once the wire-level logic was validated.</a:t>
+              <a:t>State the measurement-provenance caveat proactively and plainly, in the same tone as every other sentence on this slide — don't let your delivery shift when you get to it. The frame-level parsing and crypto were always on-device; only the revocation decision (the Δ timer) was external at measurement time, mirroring the same logic that's now been moved on-device. The on-device confirmation has since been run: 25 trials, every single one landing at exactly 15.001 seconds, because the check runs every main-loop iteration with no polling cadence left to alias against. If pressed on why the two earlier batches still matter: they're what caught and explained the polling-artifact bimodality in the first place — the on-device run is confirmation, not a replacement for that story.</a:t>
             </a:r>
           </a:p>
         </p:txBody>
@@ -964,7 +964,7 @@
           <a:lstStyle/>
           <a:p>
             <a:r>
-              <a:t>Two strip plots: time-to-revoke on the left, time-to-reverify on the right, two trial batches each. Blue is the as-deployed condition, 5-second external-monitor polling — 21 trials. Orange is fine-grained 0.2-second polling — 20 trials, run to separate the mechanism's real latency from polling artifacts. The blue row is bimodal, clustering near 15.7 and 18.2 seconds — that's aliasing against the 5-second poll interval, not the protocol misbehaving. The orange row proves it: once polling is fine-grained, time-to-revoke collapses to a tight cluster at 15.11 seconds, standard deviation six hundredths of a second — essentially exactly the 15-second freshness window plus about a tenth of a second of fixed processing overhead. That's the G4 evidence: revocation on interruption, enforced precisely. On the right, re-verification after unblocking is consistently under 1.5 seconds in both batches, bounded above by the 2.5-second heartbeat interval as expected.</a:t>
+              <a:t>Two strip plots: time-to-revoke on the left, time-to-reverify on the right, two trial batches each — blue is the as-deployed condition, 5-second external-monitor polling, 21 trials; orange is fine-grained 0.2-second polling, 20 trials, run to separate the mechanism's real latency from polling artifacts. The blue row is bimodal, clustering near 15.7 and 18.2 seconds — that's aliasing against the 5-second poll interval, not the protocol misbehaving. The orange row proves it: once polling is fine-grained, time-to-revoke collapses to a tight cluster at 15.11 seconds, standard deviation six hundredths of a second. A third batch, not shown in this chart, confirms it further: reading the receiver's own on-device [PRESENCE] transitions directly (no external polling at all), all 25 trials landed at exactly 15.001 seconds, standard deviation zero — every trial hit the same value because the check runs every main-loop iteration, so revocation fires the instant the timer crosses Δ. That's the G4 evidence: revocation on interruption, enforced exactly. On the right, re-verification after unblocking is consistently under 1.5 seconds across all three batches, bounded above by the 2.5-second heartbeat interval as expected.</a:t>
             </a:r>
           </a:p>
         </p:txBody>
@@ -1623,7 +1623,7 @@
           <a:lstStyle/>
           <a:p>
             <a:r>
-              <a:t>Six limitations, read at the same pace and volume as everything else in the talk — don't rush through this slide to get past it. The last bullet is the one to make sure lands clearly: it's not a hedge, it's a specific, named, checkable pending item, and you should be ready to say what 'confirming' it concretely means — rerunning the occlusion test against the receiver's on-device presence decision (presence_check_decay()), which was ported onto receiver_pico/src/main.c after these numbers were collected.</a:t>
+              <a:t>Six limitations, read at the same pace and volume as everything else in the talk — don't rush through this slide to get past it. The last bullet used to be a pending item — confirming the revocation-latency numbers against the on-device presence decision — and it's since been run: 25 trials, all landing at exactly 15.001 seconds. Worth calling out explicitly if asked: this is evidence the earlier externally-measured numbers weren't an artifact of the measurement harness itself.</a:t>
             </a:r>
           </a:p>
         </p:txBody>
@@ -1693,7 +1693,7 @@
           <a:lstStyle/>
           <a:p>
             <a:r>
-              <a:t>Two columns, and the grouping itself is the point: the left column closes gaps you already admitted to earlier in the talk — G3's distance-bounding, the on-device confirmation, formal verification — while the right column extends capability the system already has. Say the grouping out loud rather than just reading bullets: it signals you know what matters most next, rather than reciting a flat wish list.</a:t>
+              <a:t>Two columns, and the grouping itself is the point: the left column closes gaps you already admitted to earlier in the talk — G3's distance-bounding, formal verification — while the right column extends capability the system already has. (The on-device revocation-latency confirmation that used to be in this column is done — it moved to the Limitations slide as a closed item.) Say the grouping out loud rather than just reading bullets: it signals you know what matters most next, rather than reciting a flat wish list.</a:t>
             </a:r>
           </a:p>
         </p:txBody>
@@ -12692,7 +12692,7 @@
                 </a:solidFill>
                 <a:latin typeface="Calibri"/>
               </a:rPr>
-              <a:t>●   Re-confirming the reported numbers against this on-device decision is named explicitly as pending work, not silently assumed</a:t>
+              <a:t>●   Confirmed directly on-device: 25 occlusion trials, every one at exactly 15.001s ± 0.000s — zero polling jitter, essentially exact Δ enforcement</a:t>
             </a:r>
           </a:p>
         </p:txBody>
@@ -12857,14 +12857,14 @@
       </p:sp>
       <p:pic>
         <p:nvPicPr>
-          <p:cNvPr id="3" name="Picture 2" descr="revocation_latency.png"/>
+          <p:cNvPr id="7" name="Picture 6" descr="revocation_latency.png"/>
           <p:cNvPicPr>
             <a:picLocks noChangeAspect="1"/>
           </p:cNvPicPr>
           <p:nvPr/>
         </p:nvPicPr>
         <p:blipFill>
-          <a:blip r:embed="rId3"/>
+          <a:blip r:embed="rId5"/>
           <a:stretch>
             <a:fillRect/>
           </a:stretch>
@@ -12909,7 +12909,7 @@
                 </a:solidFill>
                 <a:latin typeface="Calibri"/>
               </a:rPr>
-              <a:t>Intrinsic time-to-revoke: 15.11s ± 0.06s — essentially exactly Δ (15s) plus fixed overhead.</a:t>
+              <a:t>On-device confirmed: 15.001s ± 0.000s across 25 trials — essentially exact Δ enforcement, zero polling jitter.</a:t>
             </a:r>
           </a:p>
         </p:txBody>
@@ -16543,7 +16543,7 @@
                 </a:solidFill>
                 <a:latin typeface="Calibri"/>
               </a:rPr>
-              <a:t>●   Revocation-latency measurements are pending re-confirmation against the on-device presence decision, ported after these numbers were collected</a:t>
+              <a:t>●   Revocation-latency confirmed on-device (15.001s ± 0.000s, n=25) — the earlier externally-measured numbers held up exactly</a:t>
             </a:r>
           </a:p>
         </p:txBody>
@@ -16809,22 +16809,6 @@
                 <a:latin typeface="Calibri"/>
               </a:rPr>
               <a:t>●   Distance-bounding challenge-response for G3 — firmware delay-sweep + ~5,000 round-trip timing runs to characterize a detection threshold Δ and false-reject cost</a:t>
-            </a:r>
-          </a:p>
-          <a:p>
-            <a:pPr>
-              <a:spcAft>
-                <a:spcPts val="1100"/>
-              </a:spcAft>
-            </a:pPr>
-            <a:r>
-              <a:rPr sz="1500">
-                <a:solidFill>
-                  <a:srgbClr val="0B0B0B"/>
-                </a:solidFill>
-                <a:latin typeface="Calibri"/>
-              </a:rPr>
-              <a:t>●   Confirm revocation-latency measurements against the on-device presence decision (receiver_pico/src/main.c), not just the external monitor</a:t>
             </a:r>
           </a:p>
           <a:p>

--- a/thesis_defense/lifi_thesis_defense.pptx
+++ b/thesis_defense/lifi_thesis_defense.pptx
@@ -1203,7 +1203,7 @@
           <a:lstStyle/>
           <a:p>
             <a:r>
-              <a:t>Two results in one timeline. At t plus zero, a legitimate heartbeat frame arrives and gets captured and pinned. At t plus 0.21 seconds, replaying that exact frame is rejected — the green marker — because its nonce is already in the replay window. That's G2 working as designed. Then the nonce window is deliberately shrunk from its production size of 64 down to 2 slots, to make a boundary condition observable in a short test instead of needing thousands of frames. Two more legitimate frames cycle through, evicting the original nonce, and at t plus 5 seconds the same frame is replayed a third time — the amber X — and this time it's accepted and decrypted. That's not a bug found by accident, it's a documented, real boundary: replay protection is bounded by window capacity, not permanent. In production at 64 slots, an attacker needs 64 fresh legitimate frames to cycle through before a captured frame becomes replayable again, which bounds how long it stays a live threat — but the limitation is real, and it's on the same slide as the positive result, not buried in a footnote. If asked why a 2-slot window: say plainly it's artificially small only to make the boundary observable quickly — the mechanism and the limitation are identical at any window size, just slower to trigger at 64.</a:t>
+              <a:t>Two results in one timeline, from one representative trial. At t plus zero, a legitimate heartbeat frame arrives and gets captured and pinned. At t plus 0.21 seconds, replaying that exact frame is rejected — the green marker — because its nonce is already in the replay window. That's G2 working as designed. Then the nonce window is deliberately shrunk from its production size of 64 down to 2 slots, to make a boundary condition observable in a short test instead of needing thousands of frames. Two more legitimate frames cycle through, evicting the original nonce, and at t plus 5 seconds the same frame is replayed a third time — the amber X — and this time it's accepted and decrypted. That's not a bug found by accident, it's a documented, real boundary: replay protection is bounded by window capacity, not permanent. This isn't a one-off: the automated harness (thesis_eval/replay_test.py) ran this exact procedure 25 times, and both outcomes reproduced 25/25 — the diagram shown is one representative trial, not the only one run. In production at 64 slots, an attacker needs 64 fresh legitimate frames to cycle through before a captured frame becomes replayable again, which bounds how long it stays a live threat — but the limitation is real, and it's on the same slide as the positive result, not buried in a footnote. If asked why a 2-slot window: say plainly it's artificially small only to make the boundary observable quickly — the mechanism and the limitation are identical at any window size, just slower to trigger at 64.</a:t>
             </a:r>
           </a:p>
         </p:txBody>
@@ -14179,7 +14179,7 @@
                 </a:solidFill>
                 <a:latin typeface="Calibri"/>
               </a:rPr>
-              <a:t>Immediate replay rejected; the same frame is re-accepted only after being deliberately evicted from a shrunk 2-slot window.</a:t>
+              <a:t>Immediate replay rejected; re-accepted only after eviction from a shrunk 2-slot window — reproduced 25/25 across independent automated trials.</a:t>
             </a:r>
           </a:p>
         </p:txBody>

--- a/thesis_defense/lifi_thesis_defense.pptx
+++ b/thesis_defense/lifi_thesis_defense.pptx
@@ -21,7 +21,6 @@
     <p:sldId id="349" r:id="rId12"/>
     <p:sldId id="263" r:id="rId13"/>
     <p:sldId id="264" r:id="rId14"/>
-    <p:sldId id="265" r:id="rId15"/>
     <p:sldId id="336" r:id="rId16"/>
     <p:sldId id="266" r:id="rId17"/>
     <p:sldId id="267" r:id="rId18"/>
@@ -45,7 +44,6 @@
     <p:sldId id="282" r:id="rId36"/>
     <p:sldId id="283" r:id="rId37"/>
     <p:sldId id="284" r:id="rId38"/>
-    <p:sldId id="285" r:id="rId39"/>
     <p:sldId id="286" r:id="rId40"/>
   </p:sldIdLst>
   <p:sldSz cx="12192000" cy="6858000"/>

--- a/thesis_defense/lifi_thesis_defense.pptx
+++ b/thesis_defense/lifi_thesis_defense.pptx
@@ -567,76 +567,6 @@
 </p:notes>
 </file>
 
-<file path=ppt/notesSlides/notesSlide13.xml><?xml version="1.0" encoding="utf-8"?>
-<p:notes xmlns:a="http://schemas.openxmlformats.org/drawingml/2006/main" xmlns:r="http://schemas.openxmlformats.org/officeDocument/2006/relationships" xmlns:p="http://schemas.openxmlformats.org/presentationml/2006/main">
-  <p:cSld>
-    <p:spTree>
-      <p:nvGrpSpPr>
-        <p:cNvPr id="1" name=""/>
-        <p:cNvGrpSpPr/>
-        <p:nvPr/>
-      </p:nvGrpSpPr>
-      <p:grpSpPr>
-        <a:xfrm>
-          <a:off x="0" y="0"/>
-          <a:ext cx="0" cy="0"/>
-          <a:chOff x="0" y="0"/>
-          <a:chExt cx="0" cy="0"/>
-        </a:xfrm>
-      </p:grpSpPr>
-      <p:sp>
-        <p:nvSpPr>
-          <p:cNvPr id="2" name="Slide Image Placeholder 1"/>
-          <p:cNvSpPr>
-            <a:spLocks noGrp="1" noRot="1" noChangeAspect="1"/>
-          </p:cNvSpPr>
-          <p:nvPr>
-            <p:ph type="sldImg" idx="2"/>
-          </p:nvPr>
-        </p:nvSpPr>
-        <p:spPr/>
-      </p:sp>
-      <p:sp>
-        <p:nvSpPr>
-          <p:cNvPr id="3" name="Notes Placeholder 2"/>
-          <p:cNvSpPr>
-            <a:spLocks noGrp="1"/>
-          </p:cNvSpPr>
-          <p:nvPr>
-            <p:ph type="body" sz="quarter" idx="3"/>
-          </p:nvPr>
-        </p:nvSpPr>
-        <p:spPr/>
-        <p:txBody>
-          <a:bodyPr/>
-          <a:lstStyle/>
-          <a:p>
-            <a:r>
-              <a:t>Two things happen with Auth in the loop that are easy to miss if you only think of provisioning as a one-time boot-up handshake. Phase one: a device entering a room broadcasts only its non-secret 8-byte key ID over light — never the session key itself. If the receiver doesn't already recognize that ID locally, it performs what the code literally calls a roaming lookup — get_session_key_by_ID over mutual TLS to the Auth server. Auth can return the session key for a valid, registered device, or reject the request outright for an unknown or revoked one. That rejection path is a second, distinct revocation mechanism from G4: G4 revokes because the physical light signal stopped; this revokes because Auth, administratively, said no — identity-layer revocation versus physical-layer revocation, and they're complementary, not redundant. Phase two: at any point after that, the receiver can issue a live HMAC challenge to the sender over the same optical or UART link — a fresh random challenge, HMAC-SHA256 under the session MAC key, AES-GCM-encrypted response, compared locally. That's a stronger, on-demand proof of live key possession, layered on top of the passive 'this frame decrypted successfully' freshness check the whole G1/G4 evaluation is built on. If asked why both mechanisms exist: the passive heartbeat check is what's continuously measured in the evaluation section; the active challenge is available whenever a stronger, interactive proof is warranted, without adding new hardware or a new channel.</a:t>
-            </a:r>
-          </a:p>
-        </p:txBody>
-      </p:sp>
-      <p:sp>
-        <p:nvSpPr>
-          <p:cNvPr id="4" name="Slide Number Placeholder 3"/>
-          <p:cNvSpPr>
-            <a:spLocks noGrp="1"/>
-          </p:cNvSpPr>
-          <p:nvPr>
-            <p:ph type="sldNum" sz="quarter" idx="5"/>
-          </p:nvPr>
-        </p:nvSpPr>
-        <p:spPr/>
-      </p:sp>
-    </p:spTree>
-  </p:cSld>
-  <p:clrMapOvr>
-    <a:masterClrMapping/>
-  </p:clrMapOvr>
-</p:notes>
-</file>
-
 <file path=ppt/notesSlides/notesSlide14.xml><?xml version="1.0" encoding="utf-8"?>
 <p:notes xmlns:a="http://schemas.openxmlformats.org/drawingml/2006/main" xmlns:r="http://schemas.openxmlformats.org/officeDocument/2006/relationships" xmlns:p="http://schemas.openxmlformats.org/presentationml/2006/main">
   <p:cSld>
@@ -1551,7 +1481,7 @@
           <a:lstStyle/>
           <a:p>
             <a:r>
-              <a:t>This closes the loop back to slide 10's scorecard, now with evidence in the last column instead of just mechanism. Read it goal by goal, evidence-first: this is the moment to sound confident, because everything in the 'evidence' column is a number you already showed them on the previous four slides — you're not introducing anything new here, just tying it together.</a:t>
+              <a:t>This closes the loop back to the Security Goals G1-G4 scorecard slide, now with evidence in the last column instead of just mechanism. Read it goal by goal, evidence-first: this is the moment to sound confident, because everything in the 'evidence' column is a number you already showed them on the previous four slides — you're not introducing anything new here, just tying it together.</a:t>
             </a:r>
           </a:p>
         </p:txBody>
@@ -2380,76 +2310,6 @@
           <a:p>
             <a:r>
               <a:t>Memorize this slide's content, don't read it verbatim in the room — but have it exact in your head. The tightest one-sentence version if you need to compress under time pressure: freshness answers 'is this new,' relay-bounding answers 'how long did this take to get here,' and this system only answers the first question.</a:t>
-            </a:r>
-          </a:p>
-        </p:txBody>
-      </p:sp>
-      <p:sp>
-        <p:nvSpPr>
-          <p:cNvPr id="4" name="Slide Number Placeholder 3"/>
-          <p:cNvSpPr>
-            <a:spLocks noGrp="1"/>
-          </p:cNvSpPr>
-          <p:nvPr>
-            <p:ph type="sldNum" sz="quarter" idx="5"/>
-          </p:nvPr>
-        </p:nvSpPr>
-        <p:spPr/>
-      </p:sp>
-    </p:spTree>
-  </p:cSld>
-  <p:clrMapOvr>
-    <a:masterClrMapping/>
-  </p:clrMapOvr>
-</p:notes>
-</file>
-
-<file path=ppt/notesSlides/notesSlide36.xml><?xml version="1.0" encoding="utf-8"?>
-<p:notes xmlns:a="http://schemas.openxmlformats.org/drawingml/2006/main" xmlns:r="http://schemas.openxmlformats.org/officeDocument/2006/relationships" xmlns:p="http://schemas.openxmlformats.org/presentationml/2006/main">
-  <p:cSld>
-    <p:spTree>
-      <p:nvGrpSpPr>
-        <p:cNvPr id="1" name=""/>
-        <p:cNvGrpSpPr/>
-        <p:nvPr/>
-      </p:nvGrpSpPr>
-      <p:grpSpPr>
-        <a:xfrm>
-          <a:off x="0" y="0"/>
-          <a:ext cx="0" cy="0"/>
-          <a:chOff x="0" y="0"/>
-          <a:chExt cx="0" cy="0"/>
-        </a:xfrm>
-      </p:grpSpPr>
-      <p:sp>
-        <p:nvSpPr>
-          <p:cNvPr id="2" name="Slide Image Placeholder 1"/>
-          <p:cNvSpPr>
-            <a:spLocks noGrp="1" noRot="1" noChangeAspect="1"/>
-          </p:cNvSpPr>
-          <p:nvPr>
-            <p:ph type="sldImg" idx="2"/>
-          </p:nvPr>
-        </p:nvSpPr>
-        <p:spPr/>
-      </p:sp>
-      <p:sp>
-        <p:nvSpPr>
-          <p:cNvPr id="3" name="Notes Placeholder 2"/>
-          <p:cNvSpPr>
-            <a:spLocks noGrp="1"/>
-          </p:cNvSpPr>
-          <p:nvPr>
-            <p:ph type="body" sz="quarter" idx="3"/>
-          </p:nvPr>
-        </p:nvSpPr>
-        <p:spPr/>
-        <p:txBody>
-          <a:bodyPr/>
-          <a:lstStyle/>
-          <a:p>
-            <a:r>
-              <a:t>Only needed if asked to justify why three separate receiver binaries exist rather than one. The honest answer: they correspond to three different Auth interaction models that were useful to isolate during development and evaluation — a proactive key-manager, a full combined session app, and a pure discovery/roaming client — not three independent implementations of the security logic, which is shared underneath via the same SST C API and the same replay/freshness code paths.</a:t>
             </a:r>
           </a:p>
         </p:txBody>
@@ -10971,8 +10831,8 @@
         </p:nvSpPr>
         <p:spPr>
           <a:xfrm>
-            <a:off x="502920" y="801303"/>
-            <a:ext cx="11155680" cy="822960"/>
+            <a:off x="533400" y="777240"/>
+            <a:ext cx="11155680" cy="538609"/>
           </a:xfrm>
           <a:prstGeom prst="rect">
             <a:avLst/>
@@ -10986,47 +10846,240 @@
           <a:lstStyle/>
           <a:p>
             <a:r>
-              <a:rPr sz="2900" b="1" dirty="0">
+              <a:rPr lang="en-US" sz="2900" b="1" dirty="0">
                 <a:solidFill>
                   <a:srgbClr val="0B0B0B"/>
                 </a:solidFill>
                 <a:latin typeface="Calibri"/>
               </a:rPr>
-              <a:t>Auth's Role Doesn't Stop After Provisioning</a:t>
-            </a:r>
-          </a:p>
-        </p:txBody>
-      </p:sp>
-      <p:pic>
-        <p:nvPicPr>
-          <p:cNvPr id="3" name="Picture 2" descr="sst_auth_role.png"/>
-          <p:cNvPicPr>
-            <a:picLocks noChangeAspect="1"/>
-          </p:cNvPicPr>
+              <a:t>Protocol Flow — Beacon to Authorization Grant</a:t>
+            </a:r>
+          </a:p>
+        </p:txBody>
+      </p:sp>
+      <p:sp>
+        <p:nvSpPr>
+          <p:cNvPr id="3" name="TextBox 2"/>
+          <p:cNvSpPr txBox="1"/>
           <p:nvPr/>
-        </p:nvPicPr>
-        <p:blipFill>
-          <a:blip r:embed="rId3"/>
-          <a:stretch>
-            <a:fillRect/>
-          </a:stretch>
-        </p:blipFill>
+        </p:nvSpPr>
         <p:spPr>
           <a:xfrm>
-            <a:off x="2818295" y="1417320"/>
-            <a:ext cx="6555105" cy="5074920"/>
+            <a:off x="502920" y="1299300"/>
+            <a:ext cx="11155680" cy="300082"/>
           </a:xfrm>
           <a:prstGeom prst="rect">
             <a:avLst/>
           </a:prstGeom>
+          <a:noFill/>
         </p:spPr>
-      </p:pic>
+        <p:txBody>
+          <a:bodyPr wrap="square">
+            <a:spAutoFit/>
+          </a:bodyPr>
+          <a:lstStyle/>
+          <a:p>
+            <a:r>
+              <a:rPr lang="en-US" sz="1350" i="1" dirty="0">
+                <a:solidFill>
+                  <a:srgbClr val="898781"/>
+                </a:solidFill>
+                <a:latin typeface="Calibri"/>
+              </a:rPr>
+              <a:t>One authorization round: what crosses the optical link, what crosses the network, and what Auth decides.</a:t>
+            </a:r>
+          </a:p>
+        </p:txBody>
+      </p:sp>
+      <p:sp>
+        <p:nvSpPr>
+          <p:cNvPr id="4" name="TextBox 3"/>
+          <p:cNvSpPr txBox="1"/>
+          <p:nvPr/>
+        </p:nvSpPr>
+        <p:spPr>
+          <a:xfrm>
+            <a:off x="685800" y="1600200"/>
+            <a:ext cx="10789920" cy="3452227"/>
+          </a:xfrm>
+          <a:prstGeom prst="rect">
+            <a:avLst/>
+          </a:prstGeom>
+          <a:noFill/>
+        </p:spPr>
+        <p:txBody>
+          <a:bodyPr wrap="square">
+            <a:spAutoFit/>
+          </a:bodyPr>
+          <a:lstStyle/>
+          <a:p>
+            <a:pPr marL="228600" indent="-228600">
+              <a:spcAft>
+                <a:spcPts val="300"/>
+              </a:spcAft>
+            </a:pPr>
+            <a:r>
+              <a:rPr lang="en-US" sz="1700" dirty="0">
+                <a:solidFill>
+                  <a:srgbClr val="0B0B0B"/>
+                </a:solidFill>
+                <a:latin typeface="Calibri"/>
+              </a:rPr>
+              <a:t>①  Beacon → Device (optical, one-way)</a:t>
+            </a:r>
+          </a:p>
+          <a:p>
+            <a:pPr marL="685800" lvl="1" indent="-228600">
+              <a:spcAft>
+                <a:spcPts val="1300"/>
+              </a:spcAft>
+            </a:pPr>
+            <a:r>
+              <a:rPr lang="en-US" sz="1500" dirty="0">
+                <a:solidFill>
+                  <a:srgbClr val="52514E"/>
+                </a:solidFill>
+                <a:latin typeface="Calibri"/>
+              </a:rPr>
+              <a:t>Sender broadcasts signed beacon B = { room_id, nonce N, timestamp t, MAC_k(·) } over the LED at fixed interval.</a:t>
+            </a:r>
+          </a:p>
+          <a:p>
+            <a:pPr marL="228600" indent="-228600">
+              <a:spcAft>
+                <a:spcPts val="300"/>
+              </a:spcAft>
+            </a:pPr>
+            <a:r>
+              <a:rPr lang="en-US" sz="1700" dirty="0">
+                <a:solidFill>
+                  <a:srgbClr val="0B0B0B"/>
+                </a:solidFill>
+                <a:latin typeface="Calibri"/>
+              </a:rPr>
+              <a:t>②  Device → Auth (network)</a:t>
+            </a:r>
+          </a:p>
+          <a:p>
+            <a:pPr marL="685800" lvl="1" indent="-228600">
+              <a:spcAft>
+                <a:spcPts val="1300"/>
+              </a:spcAft>
+            </a:pPr>
+            <a:r>
+              <a:rPr lang="en-US" sz="1500" dirty="0">
+                <a:solidFill>
+                  <a:srgbClr val="52514E"/>
+                </a:solidFill>
+                <a:latin typeface="Calibri"/>
+              </a:rPr>
+              <a:t>Device forwards the beacon it observed plus its own identity; it cannot forge N because it never held k.</a:t>
+            </a:r>
+          </a:p>
+          <a:p>
+            <a:pPr marL="228600" indent="-228600">
+              <a:spcAft>
+                <a:spcPts val="300"/>
+              </a:spcAft>
+            </a:pPr>
+            <a:r>
+              <a:rPr lang="en-US" sz="1700" dirty="0">
+                <a:solidFill>
+                  <a:srgbClr val="0B0B0B"/>
+                </a:solidFill>
+                <a:latin typeface="Calibri"/>
+              </a:rPr>
+              <a:t>③  Auth validates freshness and origin</a:t>
+            </a:r>
+          </a:p>
+          <a:p>
+            <a:pPr marL="685800" lvl="1" indent="-228600">
+              <a:spcAft>
+                <a:spcPts val="1300"/>
+              </a:spcAft>
+            </a:pPr>
+            <a:r>
+              <a:rPr lang="en-US" sz="1500" dirty="0">
+                <a:solidFill>
+                  <a:srgbClr val="52514E"/>
+                </a:solidFill>
+                <a:latin typeface="Calibri"/>
+              </a:rPr>
+              <a:t>Checks MAC under the sender's rotating key, then checks t is inside the acceptance window W and N is unseen.</a:t>
+            </a:r>
+          </a:p>
+          <a:p>
+            <a:pPr marL="228600" indent="-228600">
+              <a:spcAft>
+                <a:spcPts val="300"/>
+              </a:spcAft>
+            </a:pPr>
+            <a:r>
+              <a:rPr lang="en-US" sz="1700" dirty="0">
+                <a:solidFill>
+                  <a:srgbClr val="0B0B0B"/>
+                </a:solidFill>
+                <a:latin typeface="Calibri"/>
+              </a:rPr>
+              <a:t>④  Auth → Device: session credential</a:t>
+            </a:r>
+          </a:p>
+          <a:p>
+            <a:pPr marL="685800" lvl="1" indent="-228600">
+              <a:spcAft>
+                <a:spcPts val="1300"/>
+              </a:spcAft>
+            </a:pPr>
+            <a:r>
+              <a:rPr lang="en-US" sz="1500" dirty="0">
+                <a:solidFill>
+                  <a:srgbClr val="52514E"/>
+                </a:solidFill>
+                <a:latin typeface="Calibri"/>
+              </a:rPr>
+              <a:t>On success, Auth issues a short-lived SST session key scoped to room_id — physical presence becomes an access decision.</a:t>
+            </a:r>
+          </a:p>
+          <a:p>
+            <a:pPr marL="228600" indent="-228600">
+              <a:spcAft>
+                <a:spcPts val="300"/>
+              </a:spcAft>
+            </a:pPr>
+            <a:r>
+              <a:rPr lang="en-US" sz="1700" dirty="0">
+                <a:solidFill>
+                  <a:srgbClr val="0B0B0B"/>
+                </a:solidFill>
+                <a:latin typeface="Calibri"/>
+              </a:rPr>
+              <a:t>⑤  Continuous re-attestation</a:t>
+            </a:r>
+          </a:p>
+          <a:p>
+            <a:pPr marL="685800" lvl="1" indent="-228600">
+              <a:spcAft>
+                <a:spcPts val="1300"/>
+              </a:spcAft>
+            </a:pPr>
+            <a:r>
+              <a:rPr lang="en-US" sz="1500" dirty="0">
+                <a:solidFill>
+                  <a:srgbClr val="52514E"/>
+                </a:solidFill>
+                <a:latin typeface="Calibri"/>
+              </a:rPr>
+              <a:t>Device must present a fresh beacon each interval; on occlusion the credential expires rather than being revoked (see G4).</a:t>
+            </a:r>
+          </a:p>
+        </p:txBody>
+      </p:sp>
       <p:pic>
         <p:nvPicPr>
-          <p:cNvPr id="4" name="Picture 3" descr="A white background with text&#10;&#10;AI-generated content may be incorrect.">
+          <p:cNvPr id="7" name="Picture 6" descr="A white background with text&#10;&#10;AI-generated content may be incorrect.">
             <a:extLst>
               <a:ext uri="{FF2B5EF4-FFF2-40B4-BE49-F238E27FC236}">
-                <a16:creationId xmlns:a16="http://schemas.microsoft.com/office/drawing/2014/main" id="{842F10B3-DB57-3EBF-10AD-BD6C1B2514DF}"/>
+                <a16:creationId xmlns:a16="http://schemas.microsoft.com/office/drawing/2014/main" id="{E815CBF9-8B4C-C24C-1249-0A42B9A5F6CF}"/>
               </a:ext>
             </a:extLst>
           </p:cNvPr>
@@ -11036,7 +11089,7 @@
           <p:nvPr/>
         </p:nvPicPr>
         <p:blipFill>
-          <a:blip r:embed="rId4"/>
+          <a:blip r:embed="rId3"/>
           <a:stretch>
             <a:fillRect/>
           </a:stretch>
@@ -11053,10 +11106,10 @@
       </p:pic>
       <p:sp>
         <p:nvSpPr>
-          <p:cNvPr id="5" name="Rectangle 4">
+          <p:cNvPr id="8" name="Rectangle 7">
             <a:extLst>
               <a:ext uri="{FF2B5EF4-FFF2-40B4-BE49-F238E27FC236}">
-                <a16:creationId xmlns:a16="http://schemas.microsoft.com/office/drawing/2014/main" id="{A9039314-DA31-4692-9C1D-F224572C01CF}"/>
+                <a16:creationId xmlns:a16="http://schemas.microsoft.com/office/drawing/2014/main" id="{1D78EB68-6E49-6E62-6807-621A767964CE}"/>
               </a:ext>
             </a:extLst>
           </p:cNvPr>
@@ -11113,6 +11166,11 @@
         </p:txBody>
       </p:sp>
     </p:spTree>
+    <p:extLst>
+      <p:ext uri="{BB962C8B-B14F-4D97-AF65-F5344CB8AC3E}">
+        <p14:creationId xmlns:p14="http://schemas.microsoft.com/office/powerpoint/2010/main" val="3542443293"/>
+      </p:ext>
+    </p:extLst>
   </p:cSld>
   <p:clrMapOvr>
     <a:masterClrMapping/>
@@ -11153,8 +11211,8 @@
         </p:nvSpPr>
         <p:spPr>
           <a:xfrm>
-            <a:off x="533400" y="777240"/>
-            <a:ext cx="11155680" cy="538609"/>
+            <a:off x="518160" y="1003300"/>
+            <a:ext cx="11155680" cy="822960"/>
           </a:xfrm>
           <a:prstGeom prst="rect">
             <a:avLst/>
@@ -11168,13 +11226,13 @@
           <a:lstStyle/>
           <a:p>
             <a:r>
-              <a:rPr lang="en-US" sz="2900" b="1" dirty="0">
+              <a:rPr sz="2900" b="1" dirty="0">
                 <a:solidFill>
                   <a:srgbClr val="0B0B0B"/>
                 </a:solidFill>
                 <a:latin typeface="Calibri"/>
               </a:rPr>
-              <a:t>Protocol Flow — Beacon to Authorization Grant</a:t>
+              <a:t>Adversary Model</a:t>
             </a:r>
           </a:p>
         </p:txBody>
@@ -11187,8 +11245,8 @@
         </p:nvSpPr>
         <p:spPr>
           <a:xfrm>
-            <a:off x="502920" y="1299300"/>
-            <a:ext cx="11155680" cy="300082"/>
+            <a:off x="701040" y="1838960"/>
+            <a:ext cx="10789920" cy="4572000"/>
           </a:xfrm>
           <a:prstGeom prst="rect">
             <a:avLst/>
@@ -11201,207 +11259,109 @@
           </a:bodyPr>
           <a:lstStyle/>
           <a:p>
-            <a:r>
-              <a:rPr lang="en-US" sz="1350" i="1" dirty="0">
-                <a:solidFill>
-                  <a:srgbClr val="898781"/>
-                </a:solidFill>
-                <a:latin typeface="Calibri"/>
-              </a:rPr>
-              <a:t>One authorization round: what crosses the optical link, what crosses the network, and what Auth decides.</a:t>
-            </a:r>
-          </a:p>
-        </p:txBody>
-      </p:sp>
-      <p:sp>
-        <p:nvSpPr>
-          <p:cNvPr id="4" name="TextBox 3"/>
-          <p:cNvSpPr txBox="1"/>
-          <p:nvPr/>
-        </p:nvSpPr>
-        <p:spPr>
-          <a:xfrm>
-            <a:off x="685800" y="1600200"/>
-            <a:ext cx="10789920" cy="3452227"/>
-          </a:xfrm>
-          <a:prstGeom prst="rect">
-            <a:avLst/>
-          </a:prstGeom>
-          <a:noFill/>
-        </p:spPr>
-        <p:txBody>
-          <a:bodyPr wrap="square">
-            <a:spAutoFit/>
-          </a:bodyPr>
-          <a:lstStyle/>
-          <a:p>
-            <a:pPr marL="228600" indent="-228600">
+            <a:pPr>
               <a:spcAft>
-                <a:spcPts val="300"/>
+                <a:spcPts val="1100"/>
               </a:spcAft>
             </a:pPr>
             <a:r>
-              <a:rPr lang="en-US" sz="1700" dirty="0">
+              <a:rPr sz="1700" dirty="0">
                 <a:solidFill>
                   <a:srgbClr val="0B0B0B"/>
                 </a:solidFill>
                 <a:latin typeface="Calibri"/>
               </a:rPr>
-              <a:t>①  Beacon → Device (optical, one-way)</a:t>
-            </a:r>
-          </a:p>
-          <a:p>
-            <a:pPr marL="685800" lvl="1" indent="-228600">
+              <a:t>●   Network control — standard Dolev-Yao adversary on RF/network links (eavesdrop, replay, delay, drop, inject)</a:t>
+            </a:r>
+          </a:p>
+          <a:p>
+            <a:pPr>
               <a:spcAft>
-                <a:spcPts val="1300"/>
+                <a:spcPts val="1100"/>
               </a:spcAft>
             </a:pPr>
             <a:r>
-              <a:rPr lang="en-US" sz="1500" dirty="0">
-                <a:solidFill>
-                  <a:srgbClr val="52514E"/>
+              <a:rPr sz="1700" dirty="0">
+                <a:solidFill>
+                  <a:srgbClr val="0B0B0B"/>
                 </a:solidFill>
                 <a:latin typeface="Calibri"/>
               </a:rPr>
-              <a:t>Sender broadcasts signed beacon B = { room_id, nonce N, timestamp t, MAC_k(·) } over the LED at fixed interval.</a:t>
-            </a:r>
-          </a:p>
-          <a:p>
-            <a:pPr marL="228600" indent="-228600">
+              <a:t>●   Optical observation — passive sensors capture ciphertext, tags, nonces — never plaintext or key material</a:t>
+            </a:r>
+          </a:p>
+          <a:p>
+            <a:pPr>
               <a:spcAft>
-                <a:spcPts val="300"/>
+                <a:spcPts val="1100"/>
               </a:spcAft>
             </a:pPr>
             <a:r>
-              <a:rPr lang="en-US" sz="1700" dirty="0">
+              <a:rPr sz="1700" dirty="0">
                 <a:solidFill>
                   <a:srgbClr val="0B0B0B"/>
                 </a:solidFill>
                 <a:latin typeface="Calibri"/>
               </a:rPr>
-              <a:t>②  Device → Auth (network)</a:t>
-            </a:r>
-          </a:p>
-          <a:p>
-            <a:pPr marL="685800" lvl="1" indent="-228600">
+              <a:t>●   Relay — capture the optical signal, transport it, re-emit remotely; introduces latency δᵣₑₗₐᵧ</a:t>
+            </a:r>
+          </a:p>
+          <a:p>
+            <a:pPr>
               <a:spcAft>
-                <a:spcPts val="1300"/>
+                <a:spcPts val="1100"/>
               </a:spcAft>
             </a:pPr>
             <a:r>
-              <a:rPr lang="en-US" sz="1500" dirty="0">
-                <a:solidFill>
-                  <a:srgbClr val="52514E"/>
+              <a:rPr sz="1700" dirty="0">
+                <a:solidFill>
+                  <a:srgbClr val="0B0B0B"/>
                 </a:solidFill>
                 <a:latin typeface="Calibri"/>
               </a:rPr>
-              <a:t>Device forwards the beacon it observed plus its own identity; it cannot forge N because it never held k.</a:t>
-            </a:r>
-          </a:p>
-          <a:p>
-            <a:pPr marL="228600" indent="-228600">
+              <a:t>●   Optical injection — a rogue light source without the session key fails AES-128-GCM tag verification</a:t>
+            </a:r>
+          </a:p>
+          <a:p>
+            <a:pPr>
               <a:spcAft>
-                <a:spcPts val="300"/>
+                <a:spcPts val="1100"/>
               </a:spcAft>
             </a:pPr>
             <a:r>
-              <a:rPr lang="en-US" sz="1700" dirty="0">
+              <a:rPr sz="1700" dirty="0">
                 <a:solidFill>
                   <a:srgbClr val="0B0B0B"/>
                 </a:solidFill>
                 <a:latin typeface="Calibri"/>
               </a:rPr>
-              <a:t>③  Auth validates freshness and origin</a:t>
-            </a:r>
-          </a:p>
-          <a:p>
-            <a:pPr marL="685800" lvl="1" indent="-228600">
+              <a:t>●   Denial of service — physical obstruction, ambient-light saturation, RF jamming of the network link</a:t>
+            </a:r>
+          </a:p>
+          <a:p>
+            <a:pPr lvl="1">
               <a:spcAft>
-                <a:spcPts val="1300"/>
+                <a:spcPts val="700"/>
               </a:spcAft>
             </a:pPr>
             <a:r>
-              <a:rPr lang="en-US" sz="1500" dirty="0">
+              <a:rPr sz="1450" dirty="0">
                 <a:solidFill>
                   <a:srgbClr val="52514E"/>
                 </a:solidFill>
                 <a:latin typeface="Calibri"/>
               </a:rPr>
-              <a:t>Checks MAC under the sender's rotating key, then checks t is inside the acceptance window W and N is unseen.</a:t>
-            </a:r>
-          </a:p>
-          <a:p>
-            <a:pPr marL="228600" indent="-228600">
-              <a:spcAft>
-                <a:spcPts val="300"/>
-              </a:spcAft>
-            </a:pPr>
-            <a:r>
-              <a:rPr lang="en-US" sz="1700" dirty="0">
-                <a:solidFill>
-                  <a:srgbClr val="0B0B0B"/>
-                </a:solidFill>
-                <a:latin typeface="Calibri"/>
-              </a:rPr>
-              <a:t>④  Auth → Device: session credential</a:t>
-            </a:r>
-          </a:p>
-          <a:p>
-            <a:pPr marL="685800" lvl="1" indent="-228600">
-              <a:spcAft>
-                <a:spcPts val="1300"/>
-              </a:spcAft>
-            </a:pPr>
-            <a:r>
-              <a:rPr lang="en-US" sz="1500" dirty="0">
-                <a:solidFill>
-                  <a:srgbClr val="52514E"/>
-                </a:solidFill>
-                <a:latin typeface="Calibri"/>
-              </a:rPr>
-              <a:t>On success, Auth issues a short-lived SST session key scoped to room_id — physical presence becomes an access decision.</a:t>
-            </a:r>
-          </a:p>
-          <a:p>
-            <a:pPr marL="228600" indent="-228600">
-              <a:spcAft>
-                <a:spcPts val="300"/>
-              </a:spcAft>
-            </a:pPr>
-            <a:r>
-              <a:rPr lang="en-US" sz="1700" dirty="0">
-                <a:solidFill>
-                  <a:srgbClr val="0B0B0B"/>
-                </a:solidFill>
-                <a:latin typeface="Calibri"/>
-              </a:rPr>
-              <a:t>⑤  Continuous re-attestation</a:t>
-            </a:r>
-          </a:p>
-          <a:p>
-            <a:pPr marL="685800" lvl="1" indent="-228600">
-              <a:spcAft>
-                <a:spcPts val="1300"/>
-              </a:spcAft>
-            </a:pPr>
-            <a:r>
-              <a:rPr lang="en-US" sz="1500" dirty="0">
-                <a:solidFill>
-                  <a:srgbClr val="52514E"/>
-                </a:solidFill>
-                <a:latin typeface="Calibri"/>
-              </a:rPr>
-              <a:t>Device must present a fresh beacon each interval; on occlusion the credential expires rather than being revoked (see G4).</a:t>
+              <a:t>‒   The system fails closed by design: denial of signal → revocation, never false authorization</a:t>
             </a:r>
           </a:p>
         </p:txBody>
       </p:sp>
       <p:pic>
         <p:nvPicPr>
-          <p:cNvPr id="7" name="Picture 6" descr="A white background with text&#10;&#10;AI-generated content may be incorrect.">
+          <p:cNvPr id="4" name="Picture 3" descr="A white background with text&#10;&#10;AI-generated content may be incorrect.">
             <a:extLst>
               <a:ext uri="{FF2B5EF4-FFF2-40B4-BE49-F238E27FC236}">
-                <a16:creationId xmlns:a16="http://schemas.microsoft.com/office/drawing/2014/main" id="{E815CBF9-8B4C-C24C-1249-0A42B9A5F6CF}"/>
+                <a16:creationId xmlns:a16="http://schemas.microsoft.com/office/drawing/2014/main" id="{FEF72888-CE72-5ADB-6A05-EAED81B5D108}"/>
               </a:ext>
             </a:extLst>
           </p:cNvPr>
@@ -11428,10 +11388,10 @@
       </p:pic>
       <p:sp>
         <p:nvSpPr>
-          <p:cNvPr id="8" name="Rectangle 7">
+          <p:cNvPr id="5" name="Rectangle 4">
             <a:extLst>
               <a:ext uri="{FF2B5EF4-FFF2-40B4-BE49-F238E27FC236}">
-                <a16:creationId xmlns:a16="http://schemas.microsoft.com/office/drawing/2014/main" id="{1D78EB68-6E49-6E62-6807-621A767964CE}"/>
+                <a16:creationId xmlns:a16="http://schemas.microsoft.com/office/drawing/2014/main" id="{6B0403EE-BF2B-B038-5023-B1F39A4BEADE}"/>
               </a:ext>
             </a:extLst>
           </p:cNvPr>
@@ -11488,11 +11448,6 @@
         </p:txBody>
       </p:sp>
     </p:spTree>
-    <p:extLst>
-      <p:ext uri="{BB962C8B-B14F-4D97-AF65-F5344CB8AC3E}">
-        <p14:creationId xmlns:p14="http://schemas.microsoft.com/office/powerpoint/2010/main" val="3542443293"/>
-      </p:ext>
-    </p:extLst>
   </p:cSld>
   <p:clrMapOvr>
     <a:masterClrMapping/>
@@ -11501,283 +11456,6 @@
 </file>
 
 <file path=ppt/slides/slide15.xml><?xml version="1.0" encoding="utf-8"?>
-<p:sld xmlns:a="http://schemas.openxmlformats.org/drawingml/2006/main" xmlns:r="http://schemas.openxmlformats.org/officeDocument/2006/relationships" xmlns:p="http://schemas.openxmlformats.org/presentationml/2006/main">
-  <p:cSld>
-    <p:bg>
-      <p:bgPr>
-        <a:solidFill>
-          <a:srgbClr val="FCFCFB"/>
-        </a:solidFill>
-        <a:effectLst/>
-      </p:bgPr>
-    </p:bg>
-    <p:spTree>
-      <p:nvGrpSpPr>
-        <p:cNvPr id="1" name=""/>
-        <p:cNvGrpSpPr/>
-        <p:nvPr/>
-      </p:nvGrpSpPr>
-      <p:grpSpPr>
-        <a:xfrm>
-          <a:off x="0" y="0"/>
-          <a:ext cx="0" cy="0"/>
-          <a:chOff x="0" y="0"/>
-          <a:chExt cx="0" cy="0"/>
-        </a:xfrm>
-      </p:grpSpPr>
-      <p:sp>
-        <p:nvSpPr>
-          <p:cNvPr id="2" name="TextBox 1"/>
-          <p:cNvSpPr txBox="1"/>
-          <p:nvPr/>
-        </p:nvSpPr>
-        <p:spPr>
-          <a:xfrm>
-            <a:off x="518160" y="1003300"/>
-            <a:ext cx="11155680" cy="822960"/>
-          </a:xfrm>
-          <a:prstGeom prst="rect">
-            <a:avLst/>
-          </a:prstGeom>
-          <a:noFill/>
-        </p:spPr>
-        <p:txBody>
-          <a:bodyPr wrap="square">
-            <a:spAutoFit/>
-          </a:bodyPr>
-          <a:lstStyle/>
-          <a:p>
-            <a:r>
-              <a:rPr sz="2900" b="1" dirty="0">
-                <a:solidFill>
-                  <a:srgbClr val="0B0B0B"/>
-                </a:solidFill>
-                <a:latin typeface="Calibri"/>
-              </a:rPr>
-              <a:t>Adversary Model</a:t>
-            </a:r>
-          </a:p>
-        </p:txBody>
-      </p:sp>
-      <p:sp>
-        <p:nvSpPr>
-          <p:cNvPr id="3" name="TextBox 2"/>
-          <p:cNvSpPr txBox="1"/>
-          <p:nvPr/>
-        </p:nvSpPr>
-        <p:spPr>
-          <a:xfrm>
-            <a:off x="701040" y="1838960"/>
-            <a:ext cx="10789920" cy="4572000"/>
-          </a:xfrm>
-          <a:prstGeom prst="rect">
-            <a:avLst/>
-          </a:prstGeom>
-          <a:noFill/>
-        </p:spPr>
-        <p:txBody>
-          <a:bodyPr wrap="square">
-            <a:spAutoFit/>
-          </a:bodyPr>
-          <a:lstStyle/>
-          <a:p>
-            <a:pPr>
-              <a:spcAft>
-                <a:spcPts val="1100"/>
-              </a:spcAft>
-            </a:pPr>
-            <a:r>
-              <a:rPr sz="1700" dirty="0">
-                <a:solidFill>
-                  <a:srgbClr val="0B0B0B"/>
-                </a:solidFill>
-                <a:latin typeface="Calibri"/>
-              </a:rPr>
-              <a:t>●   Network control — standard Dolev-Yao adversary on RF/network links (eavesdrop, replay, delay, drop, inject)</a:t>
-            </a:r>
-          </a:p>
-          <a:p>
-            <a:pPr>
-              <a:spcAft>
-                <a:spcPts val="1100"/>
-              </a:spcAft>
-            </a:pPr>
-            <a:r>
-              <a:rPr sz="1700" dirty="0">
-                <a:solidFill>
-                  <a:srgbClr val="0B0B0B"/>
-                </a:solidFill>
-                <a:latin typeface="Calibri"/>
-              </a:rPr>
-              <a:t>●   Optical observation — passive sensors capture ciphertext, tags, nonces — never plaintext or key material</a:t>
-            </a:r>
-          </a:p>
-          <a:p>
-            <a:pPr>
-              <a:spcAft>
-                <a:spcPts val="1100"/>
-              </a:spcAft>
-            </a:pPr>
-            <a:r>
-              <a:rPr sz="1700" dirty="0">
-                <a:solidFill>
-                  <a:srgbClr val="0B0B0B"/>
-                </a:solidFill>
-                <a:latin typeface="Calibri"/>
-              </a:rPr>
-              <a:t>●   Relay — capture the optical signal, transport it, re-emit remotely; introduces latency δᵣₑₗₐᵧ</a:t>
-            </a:r>
-          </a:p>
-          <a:p>
-            <a:pPr>
-              <a:spcAft>
-                <a:spcPts val="1100"/>
-              </a:spcAft>
-            </a:pPr>
-            <a:r>
-              <a:rPr sz="1700" dirty="0">
-                <a:solidFill>
-                  <a:srgbClr val="0B0B0B"/>
-                </a:solidFill>
-                <a:latin typeface="Calibri"/>
-              </a:rPr>
-              <a:t>●   Optical injection — a rogue light source without the session key fails AES-128-GCM tag verification</a:t>
-            </a:r>
-          </a:p>
-          <a:p>
-            <a:pPr>
-              <a:spcAft>
-                <a:spcPts val="1100"/>
-              </a:spcAft>
-            </a:pPr>
-            <a:r>
-              <a:rPr sz="1700" dirty="0">
-                <a:solidFill>
-                  <a:srgbClr val="0B0B0B"/>
-                </a:solidFill>
-                <a:latin typeface="Calibri"/>
-              </a:rPr>
-              <a:t>●   Denial of service — physical obstruction, ambient-light saturation, RF jamming of the network link</a:t>
-            </a:r>
-          </a:p>
-          <a:p>
-            <a:pPr lvl="1">
-              <a:spcAft>
-                <a:spcPts val="700"/>
-              </a:spcAft>
-            </a:pPr>
-            <a:r>
-              <a:rPr sz="1450" dirty="0">
-                <a:solidFill>
-                  <a:srgbClr val="52514E"/>
-                </a:solidFill>
-                <a:latin typeface="Calibri"/>
-              </a:rPr>
-              <a:t>‒   The system fails closed by design: denial of signal → revocation, never false authorization</a:t>
-            </a:r>
-          </a:p>
-        </p:txBody>
-      </p:sp>
-      <p:pic>
-        <p:nvPicPr>
-          <p:cNvPr id="4" name="Picture 3" descr="A white background with text&#10;&#10;AI-generated content may be incorrect.">
-            <a:extLst>
-              <a:ext uri="{FF2B5EF4-FFF2-40B4-BE49-F238E27FC236}">
-                <a16:creationId xmlns:a16="http://schemas.microsoft.com/office/drawing/2014/main" id="{FEF72888-CE72-5ADB-6A05-EAED81B5D108}"/>
-              </a:ext>
-            </a:extLst>
-          </p:cNvPr>
-          <p:cNvPicPr>
-            <a:picLocks noChangeAspect="1"/>
-          </p:cNvPicPr>
-          <p:nvPr/>
-        </p:nvPicPr>
-        <p:blipFill>
-          <a:blip r:embed="rId3"/>
-          <a:stretch>
-            <a:fillRect/>
-          </a:stretch>
-        </p:blipFill>
-        <p:spPr>
-          <a:xfrm>
-            <a:off x="9545121" y="-4718"/>
-            <a:ext cx="2646879" cy="1477328"/>
-          </a:xfrm>
-          <a:prstGeom prst="rect">
-            <a:avLst/>
-          </a:prstGeom>
-        </p:spPr>
-      </p:pic>
-      <p:sp>
-        <p:nvSpPr>
-          <p:cNvPr id="5" name="Rectangle 4">
-            <a:extLst>
-              <a:ext uri="{FF2B5EF4-FFF2-40B4-BE49-F238E27FC236}">
-                <a16:creationId xmlns:a16="http://schemas.microsoft.com/office/drawing/2014/main" id="{6B0403EE-BF2B-B038-5023-B1F39A4BEADE}"/>
-              </a:ext>
-            </a:extLst>
-          </p:cNvPr>
-          <p:cNvSpPr/>
-          <p:nvPr/>
-        </p:nvSpPr>
-        <p:spPr>
-          <a:xfrm>
-            <a:off x="0" y="0"/>
-            <a:ext cx="9545121" cy="517206"/>
-          </a:xfrm>
-          <a:prstGeom prst="rect">
-            <a:avLst/>
-          </a:prstGeom>
-          <a:solidFill>
-            <a:srgbClr val="ECBE44"/>
-          </a:solidFill>
-          <a:ln>
-            <a:solidFill>
-              <a:schemeClr val="bg1"/>
-            </a:solidFill>
-          </a:ln>
-        </p:spPr>
-        <p:style>
-          <a:lnRef idx="2">
-            <a:schemeClr val="accent1">
-              <a:shade val="15000"/>
-            </a:schemeClr>
-          </a:lnRef>
-          <a:fillRef idx="1">
-            <a:schemeClr val="accent1"/>
-          </a:fillRef>
-          <a:effectRef idx="0">
-            <a:schemeClr val="accent1"/>
-          </a:effectRef>
-          <a:fontRef idx="minor">
-            <a:schemeClr val="lt1"/>
-          </a:fontRef>
-        </p:style>
-        <p:txBody>
-          <a:bodyPr rtlCol="0" anchor="ctr"/>
-          <a:lstStyle/>
-          <a:p>
-            <a:pPr algn="ctr"/>
-            <a:endParaRPr lang="en-US" dirty="0">
-              <a:solidFill>
-                <a:srgbClr val="FF0000"/>
-              </a:solidFill>
-              <a:highlight>
-                <a:srgbClr val="FFFF00"/>
-              </a:highlight>
-            </a:endParaRPr>
-          </a:p>
-        </p:txBody>
-      </p:sp>
-    </p:spTree>
-  </p:cSld>
-  <p:clrMapOvr>
-    <a:masterClrMapping/>
-  </p:clrMapOvr>
-</p:sld>
-</file>
-
-<file path=ppt/slides/slide16.xml><?xml version="1.0" encoding="utf-8"?>
 <p:sld xmlns:a="http://schemas.openxmlformats.org/drawingml/2006/main" xmlns:r="http://schemas.openxmlformats.org/officeDocument/2006/relationships" xmlns:p="http://schemas.openxmlformats.org/presentationml/2006/main">
   <p:cSld>
     <p:bg>
@@ -12517,7 +12195,7 @@
 </p:sld>
 </file>
 
-<file path=ppt/slides/slide17.xml><?xml version="1.0" encoding="utf-8"?>
+<file path=ppt/slides/slide16.xml><?xml version="1.0" encoding="utf-8"?>
 <p:sld xmlns:a="http://schemas.openxmlformats.org/drawingml/2006/main" xmlns:r="http://schemas.openxmlformats.org/officeDocument/2006/relationships" xmlns:p="http://schemas.openxmlformats.org/presentationml/2006/main">
   <p:cSld>
     <p:bg>
@@ -12794,7 +12472,7 @@
 </p:sld>
 </file>
 
-<file path=ppt/slides/slide18.xml><?xml version="1.0" encoding="utf-8"?>
+<file path=ppt/slides/slide17.xml><?xml version="1.0" encoding="utf-8"?>
 <p:sld xmlns:a="http://schemas.openxmlformats.org/drawingml/2006/main" xmlns:r="http://schemas.openxmlformats.org/officeDocument/2006/relationships" xmlns:p="http://schemas.openxmlformats.org/presentationml/2006/main">
   <p:cSld>
     <p:bg>
@@ -13011,7 +12689,7 @@
 </p:sld>
 </file>
 
-<file path=ppt/slides/slide19.xml><?xml version="1.0" encoding="utf-8"?>
+<file path=ppt/slides/slide18.xml><?xml version="1.0" encoding="utf-8"?>
 <p:sld xmlns:a="http://schemas.openxmlformats.org/drawingml/2006/main" xmlns:r="http://schemas.openxmlformats.org/officeDocument/2006/relationships" xmlns:p="http://schemas.openxmlformats.org/presentationml/2006/main">
   <p:cSld>
     <p:bg>
@@ -13165,6 +12843,240 @@
             <a:extLst>
               <a:ext uri="{FF2B5EF4-FFF2-40B4-BE49-F238E27FC236}">
                 <a16:creationId xmlns:a16="http://schemas.microsoft.com/office/drawing/2014/main" id="{9F7426EC-C6E5-1F3A-F7B8-66CBB09FC937}"/>
+              </a:ext>
+            </a:extLst>
+          </p:cNvPr>
+          <p:cNvSpPr/>
+          <p:nvPr/>
+        </p:nvSpPr>
+        <p:spPr>
+          <a:xfrm>
+            <a:off x="0" y="0"/>
+            <a:ext cx="9545121" cy="517206"/>
+          </a:xfrm>
+          <a:prstGeom prst="rect">
+            <a:avLst/>
+          </a:prstGeom>
+          <a:solidFill>
+            <a:srgbClr val="ECBE44"/>
+          </a:solidFill>
+          <a:ln>
+            <a:solidFill>
+              <a:schemeClr val="bg1"/>
+            </a:solidFill>
+          </a:ln>
+        </p:spPr>
+        <p:style>
+          <a:lnRef idx="2">
+            <a:schemeClr val="accent1">
+              <a:shade val="15000"/>
+            </a:schemeClr>
+          </a:lnRef>
+          <a:fillRef idx="1">
+            <a:schemeClr val="accent1"/>
+          </a:fillRef>
+          <a:effectRef idx="0">
+            <a:schemeClr val="accent1"/>
+          </a:effectRef>
+          <a:fontRef idx="minor">
+            <a:schemeClr val="lt1"/>
+          </a:fontRef>
+        </p:style>
+        <p:txBody>
+          <a:bodyPr rtlCol="0" anchor="ctr"/>
+          <a:lstStyle/>
+          <a:p>
+            <a:pPr algn="ctr"/>
+            <a:endParaRPr lang="en-US" dirty="0">
+              <a:solidFill>
+                <a:srgbClr val="FF0000"/>
+              </a:solidFill>
+              <a:highlight>
+                <a:srgbClr val="FFFF00"/>
+              </a:highlight>
+            </a:endParaRPr>
+          </a:p>
+        </p:txBody>
+      </p:sp>
+    </p:spTree>
+  </p:cSld>
+  <p:clrMapOvr>
+    <a:masterClrMapping/>
+  </p:clrMapOvr>
+</p:sld>
+</file>
+
+<file path=ppt/slides/slide19.xml><?xml version="1.0" encoding="utf-8"?>
+<p:sld xmlns:a="http://schemas.openxmlformats.org/drawingml/2006/main" xmlns:r="http://schemas.openxmlformats.org/officeDocument/2006/relationships" xmlns:p="http://schemas.openxmlformats.org/presentationml/2006/main">
+  <p:cSld>
+    <p:bg>
+      <p:bgPr>
+        <a:solidFill>
+          <a:srgbClr val="FCFCFB"/>
+        </a:solidFill>
+        <a:effectLst/>
+      </p:bgPr>
+    </p:bg>
+    <p:spTree>
+      <p:nvGrpSpPr>
+        <p:cNvPr id="1" name=""/>
+        <p:cNvGrpSpPr/>
+        <p:nvPr/>
+      </p:nvGrpSpPr>
+      <p:grpSpPr>
+        <a:xfrm>
+          <a:off x="0" y="0"/>
+          <a:ext cx="0" cy="0"/>
+          <a:chOff x="0" y="0"/>
+          <a:chExt cx="0" cy="0"/>
+        </a:xfrm>
+      </p:grpSpPr>
+      <p:sp>
+        <p:nvSpPr>
+          <p:cNvPr id="2" name="TextBox 1"/>
+          <p:cNvSpPr txBox="1"/>
+          <p:nvPr/>
+        </p:nvSpPr>
+        <p:spPr>
+          <a:xfrm>
+            <a:off x="518007" y="830179"/>
+            <a:ext cx="11155680" cy="984885"/>
+          </a:xfrm>
+          <a:prstGeom prst="rect">
+            <a:avLst/>
+          </a:prstGeom>
+          <a:noFill/>
+        </p:spPr>
+        <p:txBody>
+          <a:bodyPr wrap="square">
+            <a:spAutoFit/>
+          </a:bodyPr>
+          <a:lstStyle/>
+          <a:p>
+            <a:r>
+              <a:rPr sz="2900" b="1" dirty="0">
+                <a:solidFill>
+                  <a:srgbClr val="0B0B0B"/>
+                </a:solidFill>
+                <a:latin typeface="Calibri"/>
+              </a:rPr>
+              <a:t>G2 — Replay Rejection &amp; the Window-Boundary </a:t>
+            </a:r>
+            <a:endParaRPr lang="en-US" sz="2900" b="1" dirty="0">
+              <a:solidFill>
+                <a:srgbClr val="0B0B0B"/>
+              </a:solidFill>
+              <a:latin typeface="Calibri"/>
+            </a:endParaRPr>
+          </a:p>
+          <a:p>
+            <a:r>
+              <a:rPr sz="2900" b="1" dirty="0">
+                <a:solidFill>
+                  <a:srgbClr val="0B0B0B"/>
+                </a:solidFill>
+                <a:latin typeface="Calibri"/>
+              </a:rPr>
+              <a:t>Limitation</a:t>
+            </a:r>
+          </a:p>
+        </p:txBody>
+      </p:sp>
+      <p:pic>
+        <p:nvPicPr>
+          <p:cNvPr id="3" name="Picture 2" descr="replay_boundary.png"/>
+          <p:cNvPicPr>
+            <a:picLocks noChangeAspect="1"/>
+          </p:cNvPicPr>
+          <p:nvPr/>
+        </p:nvPicPr>
+        <p:blipFill>
+          <a:blip r:embed="rId3"/>
+          <a:stretch>
+            <a:fillRect/>
+          </a:stretch>
+        </p:blipFill>
+        <p:spPr>
+          <a:xfrm>
+            <a:off x="723747" y="1699815"/>
+            <a:ext cx="10744200" cy="4297680"/>
+          </a:xfrm>
+          <a:prstGeom prst="rect">
+            <a:avLst/>
+          </a:prstGeom>
+        </p:spPr>
+      </p:pic>
+      <p:sp>
+        <p:nvSpPr>
+          <p:cNvPr id="4" name="TextBox 3"/>
+          <p:cNvSpPr txBox="1"/>
+          <p:nvPr/>
+        </p:nvSpPr>
+        <p:spPr>
+          <a:xfrm>
+            <a:off x="502920" y="6013324"/>
+            <a:ext cx="11155680" cy="548640"/>
+          </a:xfrm>
+          <a:prstGeom prst="rect">
+            <a:avLst/>
+          </a:prstGeom>
+          <a:noFill/>
+        </p:spPr>
+        <p:txBody>
+          <a:bodyPr wrap="square">
+            <a:spAutoFit/>
+          </a:bodyPr>
+          <a:lstStyle/>
+          <a:p>
+            <a:pPr algn="ctr"/>
+            <a:r>
+              <a:rPr sz="1250" b="1" i="0">
+                <a:solidFill>
+                  <a:srgbClr val="898781"/>
+                </a:solidFill>
+                <a:latin typeface="Calibri"/>
+              </a:rPr>
+              <a:t>Immediate replay rejected; re-accepted only after eviction from a shrunk 2-slot window — reproduced 25/25 across independent automated trials.</a:t>
+            </a:r>
+          </a:p>
+        </p:txBody>
+      </p:sp>
+      <p:pic>
+        <p:nvPicPr>
+          <p:cNvPr id="5" name="Picture 4" descr="A white background with text&#10;&#10;AI-generated content may be incorrect.">
+            <a:extLst>
+              <a:ext uri="{FF2B5EF4-FFF2-40B4-BE49-F238E27FC236}">
+                <a16:creationId xmlns:a16="http://schemas.microsoft.com/office/drawing/2014/main" id="{0AFD44F8-8F5F-6BA3-85B4-745671AD1BE7}"/>
+              </a:ext>
+            </a:extLst>
+          </p:cNvPr>
+          <p:cNvPicPr>
+            <a:picLocks noChangeAspect="1"/>
+          </p:cNvPicPr>
+          <p:nvPr/>
+        </p:nvPicPr>
+        <p:blipFill>
+          <a:blip r:embed="rId4"/>
+          <a:stretch>
+            <a:fillRect/>
+          </a:stretch>
+        </p:blipFill>
+        <p:spPr>
+          <a:xfrm>
+            <a:off x="9545121" y="-4718"/>
+            <a:ext cx="2646879" cy="1477328"/>
+          </a:xfrm>
+          <a:prstGeom prst="rect">
+            <a:avLst/>
+          </a:prstGeom>
+        </p:spPr>
+      </p:pic>
+      <p:sp>
+        <p:nvSpPr>
+          <p:cNvPr id="6" name="Rectangle 5">
+            <a:extLst>
+              <a:ext uri="{FF2B5EF4-FFF2-40B4-BE49-F238E27FC236}">
+                <a16:creationId xmlns:a16="http://schemas.microsoft.com/office/drawing/2014/main" id="{0D6FB647-9E33-3425-3A75-61C3F4EE7A05}"/>
               </a:ext>
             </a:extLst>
           </p:cNvPr>
@@ -14080,8 +13992,8 @@
         </p:nvSpPr>
         <p:spPr>
           <a:xfrm>
-            <a:off x="518007" y="830179"/>
-            <a:ext cx="11155680" cy="984885"/>
+            <a:off x="518007" y="731520"/>
+            <a:ext cx="11155680" cy="822960"/>
           </a:xfrm>
           <a:prstGeom prst="rect">
             <a:avLst/>
@@ -14095,37 +14007,20 @@
           <a:lstStyle/>
           <a:p>
             <a:r>
-              <a:rPr sz="2900" b="1" dirty="0">
+              <a:rPr sz="2900" b="1">
                 <a:solidFill>
                   <a:srgbClr val="0B0B0B"/>
                 </a:solidFill>
                 <a:latin typeface="Calibri"/>
               </a:rPr>
-              <a:t>G2 — Replay Rejection &amp; the Window-Boundary </a:t>
-            </a:r>
-            <a:endParaRPr lang="en-US" sz="2900" b="1" dirty="0">
-              <a:solidFill>
-                <a:srgbClr val="0B0B0B"/>
-              </a:solidFill>
-              <a:latin typeface="Calibri"/>
-            </a:endParaRPr>
-          </a:p>
-          <a:p>
-            <a:r>
-              <a:rPr sz="2900" b="1" dirty="0">
-                <a:solidFill>
-                  <a:srgbClr val="0B0B0B"/>
-                </a:solidFill>
-                <a:latin typeface="Calibri"/>
-              </a:rPr>
-              <a:t>Limitation</a:t>
+              <a:t>Communication Performance</a:t>
             </a:r>
           </a:p>
         </p:txBody>
       </p:sp>
       <p:pic>
         <p:nvPicPr>
-          <p:cNvPr id="3" name="Picture 2" descr="replay_boundary.png"/>
+          <p:cNvPr id="3" name="Picture 2" descr="baud_sweep.png"/>
           <p:cNvPicPr>
             <a:picLocks noChangeAspect="1"/>
           </p:cNvPicPr>
@@ -14139,8 +14034,8 @@
         </p:blipFill>
         <p:spPr>
           <a:xfrm>
-            <a:off x="723747" y="1699815"/>
-            <a:ext cx="10744200" cy="4297680"/>
+            <a:off x="1107469" y="1417320"/>
+            <a:ext cx="9976757" cy="4297680"/>
           </a:xfrm>
           <a:prstGeom prst="rect">
             <a:avLst/>
@@ -14155,7 +14050,7 @@
         </p:nvSpPr>
         <p:spPr>
           <a:xfrm>
-            <a:off x="502920" y="6013324"/>
+            <a:off x="502920" y="5806440"/>
             <a:ext cx="11155680" cy="548640"/>
           </a:xfrm>
           <a:prstGeom prst="rect">
@@ -14177,7 +14072,7 @@
                 </a:solidFill>
                 <a:latin typeface="Calibri"/>
               </a:rPr>
-              <a:t>Immediate replay rejected; re-accepted only after eviction from a shrunk 2-slot window — reproduced 25/25 across independent automated trials.</a:t>
+              <a:t>Higher gain (470kΩ) beats higher bandwidth (100kΩ) at 15cm — SNR margin, not TIA bandwidth, limits close range.</a:t>
             </a:r>
           </a:p>
         </p:txBody>
@@ -14187,7 +14082,7 @@
           <p:cNvPr id="5" name="Picture 4" descr="A white background with text&#10;&#10;AI-generated content may be incorrect.">
             <a:extLst>
               <a:ext uri="{FF2B5EF4-FFF2-40B4-BE49-F238E27FC236}">
-                <a16:creationId xmlns:a16="http://schemas.microsoft.com/office/drawing/2014/main" id="{0AFD44F8-8F5F-6BA3-85B4-745671AD1BE7}"/>
+                <a16:creationId xmlns:a16="http://schemas.microsoft.com/office/drawing/2014/main" id="{261FC07C-93A2-0855-FB99-D948A27FD5A8}"/>
               </a:ext>
             </a:extLst>
           </p:cNvPr>
@@ -14217,7 +14112,7 @@
           <p:cNvPr id="6" name="Rectangle 5">
             <a:extLst>
               <a:ext uri="{FF2B5EF4-FFF2-40B4-BE49-F238E27FC236}">
-                <a16:creationId xmlns:a16="http://schemas.microsoft.com/office/drawing/2014/main" id="{0D6FB647-9E33-3425-3A75-61C3F4EE7A05}"/>
+                <a16:creationId xmlns:a16="http://schemas.microsoft.com/office/drawing/2014/main" id="{A1897D6F-97CB-D526-7BF3-AF37F4721B43}"/>
               </a:ext>
             </a:extLst>
           </p:cNvPr>
@@ -14314,8 +14209,8 @@
         </p:nvSpPr>
         <p:spPr>
           <a:xfrm>
-            <a:off x="518007" y="731520"/>
-            <a:ext cx="11155680" cy="822960"/>
+            <a:off x="533400" y="777240"/>
+            <a:ext cx="11155680" cy="538609"/>
           </a:xfrm>
           <a:prstGeom prst="rect">
             <a:avLst/>
@@ -14329,51 +14224,27 @@
           <a:lstStyle/>
           <a:p>
             <a:r>
-              <a:rPr sz="2900" b="1">
+              <a:rPr lang="en-US" sz="2900" b="1" dirty="0">
                 <a:solidFill>
                   <a:srgbClr val="0B0B0B"/>
                 </a:solidFill>
                 <a:latin typeface="Calibri"/>
               </a:rPr>
-              <a:t>Communication Performance</a:t>
-            </a:r>
-          </a:p>
-        </p:txBody>
-      </p:sp>
-      <p:pic>
-        <p:nvPicPr>
-          <p:cNvPr id="3" name="Picture 2" descr="baud_sweep.png"/>
-          <p:cNvPicPr>
-            <a:picLocks noChangeAspect="1"/>
-          </p:cNvPicPr>
+              <a:t>Formal Channel &amp; Coverage Model</a:t>
+            </a:r>
+          </a:p>
+        </p:txBody>
+      </p:sp>
+      <p:sp>
+        <p:nvSpPr>
+          <p:cNvPr id="3" name="TextBox 2"/>
+          <p:cNvSpPr txBox="1"/>
           <p:nvPr/>
-        </p:nvPicPr>
-        <p:blipFill>
-          <a:blip r:embed="rId3"/>
-          <a:stretch>
-            <a:fillRect/>
-          </a:stretch>
-        </p:blipFill>
+        </p:nvSpPr>
         <p:spPr>
           <a:xfrm>
-            <a:off x="1107469" y="1417320"/>
-            <a:ext cx="9976757" cy="4297680"/>
-          </a:xfrm>
-          <a:prstGeom prst="rect">
-            <a:avLst/>
-          </a:prstGeom>
-        </p:spPr>
-      </p:pic>
-      <p:sp>
-        <p:nvSpPr>
-          <p:cNvPr id="4" name="TextBox 3"/>
-          <p:cNvSpPr txBox="1"/>
-          <p:nvPr/>
-        </p:nvSpPr>
-        <p:spPr>
-          <a:xfrm>
-            <a:off x="502920" y="5806440"/>
-            <a:ext cx="11155680" cy="548640"/>
+            <a:off x="502920" y="1299300"/>
+            <a:ext cx="11155680" cy="300082"/>
           </a:xfrm>
           <a:prstGeom prst="rect">
             <a:avLst/>
@@ -14386,25 +14257,255 @@
           </a:bodyPr>
           <a:lstStyle/>
           <a:p>
-            <a:pPr algn="ctr"/>
-            <a:r>
-              <a:rPr sz="1250" b="1" i="0">
+            <a:r>
+              <a:rPr lang="en-US" sz="1350" i="1" dirty="0">
                 <a:solidFill>
                   <a:srgbClr val="898781"/>
                 </a:solidFill>
                 <a:latin typeface="Calibri"/>
               </a:rPr>
-              <a:t>Higher gain (470kΩ) beats higher bandwidth (100kΩ) at 15cm — SNR margin, not TIA bandwidth, limits close range.</a:t>
+              <a:t>The authorization region is not asserted — it follows from the LED radiation pattern and the receiver FoV.</a:t>
+            </a:r>
+          </a:p>
+        </p:txBody>
+      </p:sp>
+      <p:sp>
+        <p:nvSpPr>
+          <p:cNvPr id="4" name="TextBox 3"/>
+          <p:cNvSpPr txBox="1"/>
+          <p:nvPr/>
+        </p:nvSpPr>
+        <p:spPr>
+          <a:xfrm>
+            <a:off x="685800" y="1600200"/>
+            <a:ext cx="10789920" cy="4755148"/>
+          </a:xfrm>
+          <a:prstGeom prst="rect">
+            <a:avLst/>
+          </a:prstGeom>
+          <a:noFill/>
+        </p:spPr>
+        <p:txBody>
+          <a:bodyPr wrap="square">
+            <a:spAutoFit/>
+          </a:bodyPr>
+          <a:lstStyle/>
+          <a:p>
+            <a:pPr marL="0" indent="0">
+              <a:spcBef>
+                <a:spcPts val="900"/>
+              </a:spcBef>
+              <a:spcAft>
+                <a:spcPts val="500"/>
+              </a:spcAft>
+              <a:buNone/>
+            </a:pPr>
+            <a:r>
+              <a:rPr lang="en-US" sz="1800" b="1" dirty="0">
+                <a:solidFill>
+                  <a:srgbClr val="0B0B0B"/>
+                </a:solidFill>
+                <a:latin typeface="Calibri"/>
+              </a:rPr>
+              <a:t>Lambertian emission order, from the LED half-power semi-angle Φ½</a:t>
+            </a:r>
+          </a:p>
+          <a:p>
+            <a:pPr marL="228600" indent="0" algn="l">
+              <a:spcAft>
+                <a:spcPts val="500"/>
+              </a:spcAft>
+              <a:buNone/>
+            </a:pPr>
+            <a:r>
+              <a:rPr lang="en-US" sz="1900" i="1" dirty="0">
+                <a:solidFill>
+                  <a:srgbClr val="1F3864"/>
+                </a:solidFill>
+                <a:latin typeface="Cambria Math"/>
+              </a:rPr>
+              <a:t>m = − ln 2 / ln( cos Φ½ )        [2]</a:t>
+            </a:r>
+          </a:p>
+          <a:p>
+            <a:pPr marL="0" indent="0">
+              <a:spcBef>
+                <a:spcPts val="900"/>
+              </a:spcBef>
+              <a:spcAft>
+                <a:spcPts val="500"/>
+              </a:spcAft>
+              <a:buNone/>
+            </a:pPr>
+            <a:r>
+              <a:rPr lang="en-US" sz="1800" b="1" dirty="0">
+                <a:solidFill>
+                  <a:srgbClr val="0B0B0B"/>
+                </a:solidFill>
+                <a:latin typeface="Calibri"/>
+              </a:rPr>
+              <a:t>Line-of-sight DC channel gain [2], [3]</a:t>
+            </a:r>
+          </a:p>
+          <a:p>
+            <a:pPr marL="228600" indent="0" algn="l">
+              <a:spcAft>
+                <a:spcPts val="500"/>
+              </a:spcAft>
+              <a:buNone/>
+            </a:pPr>
+            <a:r>
+              <a:rPr lang="en-US" sz="1900" i="1" dirty="0">
+                <a:solidFill>
+                  <a:srgbClr val="1F3864"/>
+                </a:solidFill>
+                <a:latin typeface="Cambria Math"/>
+              </a:rPr>
+              <a:t>H(0) = [ (m+1)·Aᵣ / 2πd² ] · cosᵐ(φ) · Tₛ(ψ) · g(ψ) · cos(ψ),   0 ≤ ψ ≤ Ψᴄ    (0 otherwise)</a:t>
+            </a:r>
+          </a:p>
+          <a:p>
+            <a:pPr marL="228600" indent="0">
+              <a:spcAft>
+                <a:spcPts val="900"/>
+              </a:spcAft>
+              <a:buNone/>
+            </a:pPr>
+            <a:r>
+              <a:rPr lang="en-US" sz="1500" dirty="0">
+                <a:solidFill>
+                  <a:srgbClr val="52514E"/>
+                </a:solidFill>
+                <a:latin typeface="Calibri"/>
+              </a:rPr>
+              <a:t>d = TX–RX distance · φ = irradiance angle · ψ = incidence angle · Aᵣ = detector area · Ψᴄ = receiver FoV half-angle</a:t>
+            </a:r>
+          </a:p>
+          <a:p>
+            <a:pPr marL="0" indent="0">
+              <a:spcBef>
+                <a:spcPts val="900"/>
+              </a:spcBef>
+              <a:spcAft>
+                <a:spcPts val="500"/>
+              </a:spcAft>
+              <a:buNone/>
+            </a:pPr>
+            <a:r>
+              <a:rPr lang="en-US" sz="1800" b="1" dirty="0">
+                <a:solidFill>
+                  <a:srgbClr val="0B0B0B"/>
+                </a:solidFill>
+                <a:latin typeface="Calibri"/>
+              </a:rPr>
+              <a:t>Concentrator gain and received optical power</a:t>
+            </a:r>
+          </a:p>
+          <a:p>
+            <a:pPr marL="228600" indent="0" algn="l">
+              <a:spcAft>
+                <a:spcPts val="500"/>
+              </a:spcAft>
+              <a:buNone/>
+            </a:pPr>
+            <a:r>
+              <a:rPr lang="en-US" sz="1900" i="1" dirty="0">
+                <a:solidFill>
+                  <a:srgbClr val="1F3864"/>
+                </a:solidFill>
+                <a:latin typeface="Cambria Math"/>
+              </a:rPr>
+              <a:t>g(ψ) = n² / sin²(Ψᴄ)          Pᵣ = H(0) · Pₜ        [2]</a:t>
+            </a:r>
+          </a:p>
+          <a:p>
+            <a:pPr marL="0" indent="0">
+              <a:spcBef>
+                <a:spcPts val="900"/>
+              </a:spcBef>
+              <a:spcAft>
+                <a:spcPts val="500"/>
+              </a:spcAft>
+              <a:buNone/>
+            </a:pPr>
+            <a:r>
+              <a:rPr lang="en-US" sz="1800" b="1" dirty="0">
+                <a:solidFill>
+                  <a:srgbClr val="0B0B0B"/>
+                </a:solidFill>
+                <a:latin typeface="Calibri"/>
+              </a:rPr>
+              <a:t>Authorization region — the volume G1 actually protects</a:t>
+            </a:r>
+          </a:p>
+          <a:p>
+            <a:pPr marL="228600" indent="0" algn="l">
+              <a:spcAft>
+                <a:spcPts val="500"/>
+              </a:spcAft>
+              <a:buNone/>
+            </a:pPr>
+            <a:r>
+              <a:rPr lang="en-US" sz="1900" i="1" dirty="0">
+                <a:solidFill>
+                  <a:srgbClr val="1F3864"/>
+                </a:solidFill>
+                <a:latin typeface="Cambria Math"/>
+              </a:rPr>
+              <a:t>Authorized(x) ⇔ Pᵣ(x) ≥ Pₘᵢₙ  ∧  ψ(x) ≤ Ψᴄ        V ≈ (2π/3)·R³·(1 − cos θ)</a:t>
+            </a:r>
+          </a:p>
+          <a:p>
+            <a:pPr marL="228600" indent="0">
+              <a:spcAft>
+                <a:spcPts val="900"/>
+              </a:spcAft>
+              <a:buNone/>
+            </a:pPr>
+            <a:r>
+              <a:rPr lang="en-US" sz="1500" dirty="0">
+                <a:solidFill>
+                  <a:srgbClr val="52514E"/>
+                </a:solidFill>
+                <a:latin typeface="Calibri"/>
+              </a:rPr>
+              <a:t>R and θ are physical constants of the deployment — not yet independently measured on this bench. The model describes the shape of the authorized region; characterizing its exact size is future work.</a:t>
+            </a:r>
+          </a:p>
+          <a:p>
+            <a:pPr marL="0" indent="0">
+              <a:spcBef>
+                <a:spcPts val="1100"/>
+              </a:spcBef>
+              <a:buNone/>
+            </a:pPr>
+            <a:r>
+              <a:rPr lang="en-US" sz="1500" b="1" i="1" dirty="0">
+                <a:solidFill>
+                  <a:srgbClr val="1F3864"/>
+                </a:solidFill>
+                <a:latin typeface="Calibri"/>
+              </a:rPr>
+              <a:t>Provenance: </a:t>
+            </a:r>
+            <a:r>
+              <a:rPr lang="en-US" sz="1500" i="1" dirty="0">
+                <a:solidFill>
+                  <a:srgbClr val="52514E"/>
+                </a:solidFill>
+                <a:latin typeface="Calibri"/>
+              </a:rPr>
+              <a:t>the channel and coverage equations above are standard results from [2], [3]; the volume expression is elementary solid geometry. The authorization predicate and the G3 condition (next slide) are this work’s formulation.</a:t>
             </a:r>
           </a:p>
         </p:txBody>
       </p:sp>
       <p:pic>
         <p:nvPicPr>
-          <p:cNvPr id="5" name="Picture 4" descr="A white background with text&#10;&#10;AI-generated content may be incorrect.">
+          <p:cNvPr id="7" name="Picture 6" descr="A white background with text&#10;&#10;AI-generated content may be incorrect.">
             <a:extLst>
               <a:ext uri="{FF2B5EF4-FFF2-40B4-BE49-F238E27FC236}">
-                <a16:creationId xmlns:a16="http://schemas.microsoft.com/office/drawing/2014/main" id="{261FC07C-93A2-0855-FB99-D948A27FD5A8}"/>
+                <a16:creationId xmlns:a16="http://schemas.microsoft.com/office/drawing/2014/main" id="{E815CBF9-8B4C-C24C-1249-0A42B9A5F6CF}"/>
               </a:ext>
             </a:extLst>
           </p:cNvPr>
@@ -14414,7 +14515,7 @@
           <p:nvPr/>
         </p:nvPicPr>
         <p:blipFill>
-          <a:blip r:embed="rId4"/>
+          <a:blip r:embed="rId3"/>
           <a:stretch>
             <a:fillRect/>
           </a:stretch>
@@ -14431,10 +14532,10 @@
       </p:pic>
       <p:sp>
         <p:nvSpPr>
-          <p:cNvPr id="6" name="Rectangle 5">
+          <p:cNvPr id="8" name="Rectangle 7">
             <a:extLst>
               <a:ext uri="{FF2B5EF4-FFF2-40B4-BE49-F238E27FC236}">
-                <a16:creationId xmlns:a16="http://schemas.microsoft.com/office/drawing/2014/main" id="{A1897D6F-97CB-D526-7BF3-AF37F4721B43}"/>
+                <a16:creationId xmlns:a16="http://schemas.microsoft.com/office/drawing/2014/main" id="{1D78EB68-6E49-6E62-6807-621A767964CE}"/>
               </a:ext>
             </a:extLst>
           </p:cNvPr>
@@ -14491,6 +14592,11 @@
         </p:txBody>
       </p:sp>
     </p:spTree>
+    <p:extLst>
+      <p:ext uri="{BB962C8B-B14F-4D97-AF65-F5344CB8AC3E}">
+        <p14:creationId xmlns:p14="http://schemas.microsoft.com/office/powerpoint/2010/main" val="4254009860"/>
+      </p:ext>
+    </p:extLst>
   </p:cSld>
   <p:clrMapOvr>
     <a:masterClrMapping/>
@@ -14552,7 +14658,7 @@
                 </a:solidFill>
                 <a:latin typeface="Calibri"/>
               </a:rPr>
-              <a:t>Formal Channel &amp; Coverage Model</a:t>
+              <a:t>Proximity Predicate &amp; the G3 Security Condition</a:t>
             </a:r>
           </a:p>
         </p:txBody>
@@ -14586,7 +14692,7 @@
                 </a:solidFill>
                 <a:latin typeface="Calibri"/>
               </a:rPr>
-              <a:t>The authorization region is not asserted — it follows from the LED radiation pattern and the receiver FoV.</a:t>
+              <a:t>What the system actually decides — and the exact inequality on which G3 stands or falls.</a:t>
             </a:r>
           </a:p>
         </p:txBody>
@@ -14600,7 +14706,7 @@
         <p:spPr>
           <a:xfrm>
             <a:off x="685800" y="1600200"/>
-            <a:ext cx="10789920" cy="4755148"/>
+            <a:ext cx="10789920" cy="4821833"/>
           </a:xfrm>
           <a:prstGeom prst="rect">
             <a:avLst/>
@@ -14615,38 +14721,183 @@
           <a:p>
             <a:pPr marL="0" indent="0">
               <a:spcBef>
-                <a:spcPts val="900"/>
+                <a:spcPts val="800"/>
               </a:spcBef>
               <a:spcAft>
-                <a:spcPts val="500"/>
+                <a:spcPts val="400"/>
               </a:spcAft>
               <a:buNone/>
             </a:pPr>
             <a:r>
-              <a:rPr lang="en-US" sz="1800" b="1" dirty="0">
+              <a:rPr lang="en-US" sz="1750" b="1" dirty="0">
                 <a:solidFill>
                   <a:srgbClr val="0B0B0B"/>
                 </a:solidFill>
                 <a:latin typeface="Calibri"/>
               </a:rPr>
-              <a:t>Lambertian emission order, from the LED half-power semi-angle Φ½</a:t>
-            </a:r>
-          </a:p>
-          <a:p>
-            <a:pPr marL="228600" indent="0" algn="l">
+              <a:t>Classical distance bound from round-trip time [4], [5]</a:t>
+            </a:r>
+          </a:p>
+          <a:p>
+            <a:pPr marL="228600" indent="0">
               <a:spcAft>
-                <a:spcPts val="500"/>
+                <a:spcPts val="300"/>
               </a:spcAft>
               <a:buNone/>
             </a:pPr>
             <a:r>
-              <a:rPr lang="en-US" sz="1900" i="1" dirty="0">
+              <a:rPr lang="en-US" sz="1800" i="1" dirty="0">
                 <a:solidFill>
                   <a:srgbClr val="1F3864"/>
                 </a:solidFill>
                 <a:latin typeface="Cambria Math"/>
               </a:rPr>
-              <a:t>m = − ln 2 / ln( cos Φ½ )        [2]</a:t>
+              <a:t>d ≤ c · ( t_RTT − t_proc ) / 2</a:t>
+            </a:r>
+          </a:p>
+          <a:p>
+            <a:pPr marL="228600" indent="0">
+              <a:spcAft>
+                <a:spcPts val="600"/>
+              </a:spcAft>
+              <a:buNone/>
+            </a:pPr>
+            <a:r>
+              <a:rPr lang="en-US" sz="1500" dirty="0">
+                <a:solidFill>
+                  <a:srgbClr val="52514E"/>
+                </a:solidFill>
+                <a:latin typeface="Calibri"/>
+              </a:rPr>
+              <a:t>This bounds distance only when timing resolution is small relative to c. At Pico-class resolution it is not a distance bound — it is a latency bound. Stated here so the distinction is explicit.</a:t>
+            </a:r>
+          </a:p>
+          <a:p>
+            <a:pPr marL="0" indent="0">
+              <a:spcBef>
+                <a:spcPts val="800"/>
+              </a:spcBef>
+              <a:spcAft>
+                <a:spcPts val="400"/>
+              </a:spcAft>
+              <a:buNone/>
+            </a:pPr>
+            <a:r>
+              <a:rPr lang="en-US" sz="1750" b="1" dirty="0">
+                <a:solidFill>
+                  <a:srgbClr val="0B0B0B"/>
+                </a:solidFill>
+                <a:latin typeface="Calibri"/>
+              </a:rPr>
+              <a:t>Acceptance predicate as implemented</a:t>
+            </a:r>
+          </a:p>
+          <a:p>
+            <a:pPr marL="228600" indent="0">
+              <a:spcAft>
+                <a:spcPts val="300"/>
+              </a:spcAft>
+              <a:buNone/>
+            </a:pPr>
+            <a:r>
+              <a:rPr lang="en-US" sz="1800" i="1" dirty="0">
+                <a:solidFill>
+                  <a:srgbClr val="1F3864"/>
+                </a:solidFill>
+                <a:latin typeface="Cambria Math"/>
+              </a:rPr>
+              <a:t>Accept ⇔ MACₖ(B) valid  ∧  | t_now − t_B | ≤ W  ∧  N ∉ Seen  ∧  RTT ≤ Δ</a:t>
+            </a:r>
+          </a:p>
+          <a:p>
+            <a:pPr marL="0" indent="0">
+              <a:spcBef>
+                <a:spcPts val="800"/>
+              </a:spcBef>
+              <a:spcAft>
+                <a:spcPts val="400"/>
+              </a:spcAft>
+              <a:buNone/>
+            </a:pPr>
+            <a:r>
+              <a:rPr lang="en-US" sz="1750" b="1" dirty="0">
+                <a:solidFill>
+                  <a:srgbClr val="0B0B0B"/>
+                </a:solidFill>
+                <a:latin typeface="Calibri"/>
+              </a:rPr>
+              <a:t>The G3 condition</a:t>
+            </a:r>
+          </a:p>
+          <a:p>
+            <a:pPr marL="228600" indent="0">
+              <a:spcAft>
+                <a:spcPts val="300"/>
+              </a:spcAft>
+              <a:buNone/>
+            </a:pPr>
+            <a:r>
+              <a:rPr lang="en-US" sz="1800" i="1" dirty="0">
+                <a:solidFill>
+                  <a:srgbClr val="1F3864"/>
+                </a:solidFill>
+                <a:latin typeface="Cambria Math"/>
+              </a:rPr>
+              <a:t>G3 holds ⇔ Δ &lt; L_relay      where L_relay = min feasible relay latency</a:t>
+            </a:r>
+          </a:p>
+          <a:p>
+            <a:pPr marL="228600" indent="0">
+              <a:spcAft>
+                <a:spcPts val="600"/>
+              </a:spcAft>
+              <a:buNone/>
+            </a:pPr>
+            <a:r>
+              <a:rPr lang="en-US" sz="1500" dirty="0">
+                <a:solidFill>
+                  <a:srgbClr val="52514E"/>
+                </a:solidFill>
+                <a:latin typeface="Calibri"/>
+              </a:rPr>
+              <a:t>Decode-and-forward relays report L_relay ≈ 200–500 ms [6]; any Δ below that is rejected. Amplify-and-forward relays drive L_relay toward zero, so no achievable Δ detects them [7] — the optical geometry of the previous slide, not the timing bound, is what raises their cost.</a:t>
+            </a:r>
+          </a:p>
+          <a:p>
+            <a:pPr marL="0" indent="0">
+              <a:spcBef>
+                <a:spcPts val="800"/>
+              </a:spcBef>
+              <a:spcAft>
+                <a:spcPts val="400"/>
+              </a:spcAft>
+              <a:buNone/>
+            </a:pPr>
+            <a:r>
+              <a:rPr lang="en-US" sz="1750" b="1" dirty="0">
+                <a:solidFill>
+                  <a:srgbClr val="0B0B0B"/>
+                </a:solidFill>
+                <a:latin typeface="Calibri"/>
+              </a:rPr>
+              <a:t>Why the two defenses are a pair, not a redundancy</a:t>
+            </a:r>
+          </a:p>
+          <a:p>
+            <a:pPr marL="228600" indent="0">
+              <a:spcAft>
+                <a:spcPts val="600"/>
+              </a:spcAft>
+              <a:buNone/>
+            </a:pPr>
+            <a:r>
+              <a:rPr lang="en-US" sz="1500" dirty="0">
+                <a:solidFill>
+                  <a:srgbClr val="52514E"/>
+                </a:solidFill>
+                <a:latin typeface="Calibri"/>
+              </a:rPr>
+              <a:t>Timing (Δ) closes the digital-relay path; the bounded cone V closes the physical-reach path. Neither is sufficient alone.</a:t>
             </a:r>
           </a:p>
           <a:p>
@@ -14654,170 +14905,25 @@
               <a:spcBef>
                 <a:spcPts val="900"/>
               </a:spcBef>
-              <a:spcAft>
-                <a:spcPts val="500"/>
-              </a:spcAft>
               <a:buNone/>
             </a:pPr>
             <a:r>
-              <a:rPr lang="en-US" sz="1800" b="1" dirty="0">
-                <a:solidFill>
-                  <a:srgbClr val="0B0B0B"/>
+              <a:rPr lang="en-US" sz="1500" b="1" i="1" dirty="0">
+                <a:solidFill>
+                  <a:srgbClr val="1F3864"/>
                 </a:solidFill>
                 <a:latin typeface="Calibri"/>
               </a:rPr>
-              <a:t>Line-of-sight DC channel gain [2], [3]</a:t>
-            </a:r>
-          </a:p>
-          <a:p>
-            <a:pPr marL="228600" indent="0" algn="l">
-              <a:spcAft>
-                <a:spcPts val="500"/>
-              </a:spcAft>
-              <a:buNone/>
-            </a:pPr>
-            <a:r>
-              <a:rPr lang="en-US" sz="1900" i="1" dirty="0">
-                <a:solidFill>
-                  <a:srgbClr val="1F3864"/>
-                </a:solidFill>
-                <a:latin typeface="Cambria Math"/>
-              </a:rPr>
-              <a:t>H(0) = [ (m+1)·Aᵣ / 2πd² ] · cosᵐ(φ) · Tₛ(ψ) · g(ψ) · cos(ψ),   0 ≤ ψ ≤ Ψᴄ    (0 otherwise)</a:t>
-            </a:r>
-          </a:p>
-          <a:p>
-            <a:pPr marL="228600" indent="0">
-              <a:spcAft>
-                <a:spcPts val="900"/>
-              </a:spcAft>
-              <a:buNone/>
-            </a:pPr>
-            <a:r>
-              <a:rPr lang="en-US" sz="1500" dirty="0">
+              <a:t>Provenance: </a:t>
+            </a:r>
+            <a:r>
+              <a:rPr lang="en-US" sz="1500" i="1" dirty="0">
                 <a:solidFill>
                   <a:srgbClr val="52514E"/>
                 </a:solidFill>
                 <a:latin typeface="Calibri"/>
               </a:rPr>
-              <a:t>d = TX–RX distance · φ = irradiance angle · ψ = incidence angle · Aᵣ = detector area · Ψᴄ = receiver FoV half-angle</a:t>
-            </a:r>
-          </a:p>
-          <a:p>
-            <a:pPr marL="0" indent="0">
-              <a:spcBef>
-                <a:spcPts val="900"/>
-              </a:spcBef>
-              <a:spcAft>
-                <a:spcPts val="500"/>
-              </a:spcAft>
-              <a:buNone/>
-            </a:pPr>
-            <a:r>
-              <a:rPr lang="en-US" sz="1800" b="1" dirty="0">
-                <a:solidFill>
-                  <a:srgbClr val="0B0B0B"/>
-                </a:solidFill>
-                <a:latin typeface="Calibri"/>
-              </a:rPr>
-              <a:t>Concentrator gain and received optical power</a:t>
-            </a:r>
-          </a:p>
-          <a:p>
-            <a:pPr marL="228600" indent="0" algn="l">
-              <a:spcAft>
-                <a:spcPts val="500"/>
-              </a:spcAft>
-              <a:buNone/>
-            </a:pPr>
-            <a:r>
-              <a:rPr lang="en-US" sz="1900" i="1" dirty="0">
-                <a:solidFill>
-                  <a:srgbClr val="1F3864"/>
-                </a:solidFill>
-                <a:latin typeface="Cambria Math"/>
-              </a:rPr>
-              <a:t>g(ψ) = n² / sin²(Ψᴄ)          Pᵣ = H(0) · Pₜ        [2]</a:t>
-            </a:r>
-          </a:p>
-          <a:p>
-            <a:pPr marL="0" indent="0">
-              <a:spcBef>
-                <a:spcPts val="900"/>
-              </a:spcBef>
-              <a:spcAft>
-                <a:spcPts val="500"/>
-              </a:spcAft>
-              <a:buNone/>
-            </a:pPr>
-            <a:r>
-              <a:rPr lang="en-US" sz="1800" b="1" dirty="0">
-                <a:solidFill>
-                  <a:srgbClr val="0B0B0B"/>
-                </a:solidFill>
-                <a:latin typeface="Calibri"/>
-              </a:rPr>
-              <a:t>Authorization region — the volume G1 actually protects</a:t>
-            </a:r>
-          </a:p>
-          <a:p>
-            <a:pPr marL="228600" indent="0" algn="l">
-              <a:spcAft>
-                <a:spcPts val="500"/>
-              </a:spcAft>
-              <a:buNone/>
-            </a:pPr>
-            <a:r>
-              <a:rPr lang="en-US" sz="1900" i="1" dirty="0">
-                <a:solidFill>
-                  <a:srgbClr val="1F3864"/>
-                </a:solidFill>
-                <a:latin typeface="Cambria Math"/>
-              </a:rPr>
-              <a:t>Authorized(x) ⇔ Pᵣ(x) ≥ Pₘᵢₙ  ∧  ψ(x) ≤ Ψᴄ        V ≈ (2π/3)·R³·(1 − cos θ)</a:t>
-            </a:r>
-          </a:p>
-          <a:p>
-            <a:pPr marL="228600" indent="0">
-              <a:spcAft>
-                <a:spcPts val="900"/>
-              </a:spcAft>
-              <a:buNone/>
-            </a:pPr>
-            <a:r>
-              <a:rPr lang="en-US" sz="1500" dirty="0">
-                <a:solidFill>
-                  <a:srgbClr val="52514E"/>
-                </a:solidFill>
-                <a:latin typeface="Calibri"/>
-              </a:rPr>
-              <a:t>R and θ are physical constants of the deployment — not yet independently measured on this bench. The model describes the shape of the authorized region; characterizing its exact size is future work.</a:t>
-            </a:r>
-          </a:p>
-          <a:p>
-            <a:pPr marL="0" indent="0">
-              <a:spcBef>
-                <a:spcPts val="1100"/>
-              </a:spcBef>
-              <a:buNone/>
-            </a:pPr>
-            <a:r>
-              <a:rPr lang="en-US" sz="1500" b="1" i="1" dirty="0">
-                <a:solidFill>
-                  <a:srgbClr val="1F3864"/>
-                </a:solidFill>
-                <a:latin typeface="Calibri"/>
-              </a:rPr>
-              <a:t>Provenance: </a:t>
-            </a:r>
-            <a:r>
-              <a:rPr lang="en-US" sz="1500" i="1" dirty="0">
-                <a:solidFill>
-                  <a:srgbClr val="52514E"/>
-                </a:solidFill>
-                <a:latin typeface="Calibri"/>
-              </a:rPr>
-              <a:t>the channel and coverage equations above are standard results from [2], [3]; the volume expression is elementary solid geometry. The authorization predicate and the G3 condition (next slide) are this work’s formulation.</a:t>
+              <a:t>the RTT distance bound is due to [4], [5]; relay-latency figures are from [6], [7]. The acceptance predicate and the G3 condition are this work’s formulation.</a:t>
             </a:r>
           </a:p>
         </p:txBody>
@@ -14916,7 +15022,7 @@
     </p:spTree>
     <p:extLst>
       <p:ext uri="{BB962C8B-B14F-4D97-AF65-F5344CB8AC3E}">
-        <p14:creationId xmlns:p14="http://schemas.microsoft.com/office/powerpoint/2010/main" val="4254009860"/>
+        <p14:creationId xmlns:p14="http://schemas.microsoft.com/office/powerpoint/2010/main" val="1851031038"/>
       </p:ext>
     </p:extLst>
   </p:cSld>
@@ -14959,8 +15065,8 @@
         </p:nvSpPr>
         <p:spPr>
           <a:xfrm>
-            <a:off x="533400" y="777240"/>
-            <a:ext cx="11155680" cy="538609"/>
+            <a:off x="502920" y="777240"/>
+            <a:ext cx="11155680" cy="822960"/>
           </a:xfrm>
           <a:prstGeom prst="rect">
             <a:avLst/>
@@ -14974,13 +15080,13 @@
           <a:lstStyle/>
           <a:p>
             <a:r>
-              <a:rPr lang="en-US" sz="2900" b="1" dirty="0">
+              <a:rPr sz="2900" b="1">
                 <a:solidFill>
                   <a:srgbClr val="0B0B0B"/>
                 </a:solidFill>
                 <a:latin typeface="Calibri"/>
               </a:rPr>
-              <a:t>Proximity Predicate &amp; the G3 Security Condition</a:t>
+              <a:t>G3 — A Named Limitation, Not a Discovered Gap</a:t>
             </a:r>
           </a:p>
         </p:txBody>
@@ -14993,8 +15099,8 @@
         </p:nvSpPr>
         <p:spPr>
           <a:xfrm>
-            <a:off x="502920" y="1299300"/>
-            <a:ext cx="11155680" cy="300082"/>
+            <a:off x="685800" y="1600200"/>
+            <a:ext cx="10789920" cy="4572000"/>
           </a:xfrm>
           <a:prstGeom prst="rect">
             <a:avLst/>
@@ -15007,255 +15113,141 @@
           </a:bodyPr>
           <a:lstStyle/>
           <a:p>
-            <a:r>
-              <a:rPr lang="en-US" sz="1350" i="1" dirty="0">
-                <a:solidFill>
-                  <a:srgbClr val="898781"/>
+            <a:pPr>
+              <a:spcAft>
+                <a:spcPts val="1100"/>
+              </a:spcAft>
+            </a:pPr>
+            <a:r>
+              <a:rPr sz="1700">
+                <a:solidFill>
+                  <a:srgbClr val="0B0B0B"/>
                 </a:solidFill>
                 <a:latin typeface="Calibri"/>
               </a:rPr>
-              <a:t>What the system actually decides — and the exact inequality on which G3 stands or falls.</a:t>
-            </a:r>
-          </a:p>
-        </p:txBody>
-      </p:sp>
-      <p:sp>
-        <p:nvSpPr>
-          <p:cNvPr id="4" name="TextBox 3"/>
-          <p:cNvSpPr txBox="1"/>
-          <p:nvPr/>
-        </p:nvSpPr>
-        <p:spPr>
-          <a:xfrm>
-            <a:off x="685800" y="1600200"/>
-            <a:ext cx="10789920" cy="4821833"/>
-          </a:xfrm>
-          <a:prstGeom prst="rect">
-            <a:avLst/>
-          </a:prstGeom>
-          <a:noFill/>
-        </p:spPr>
-        <p:txBody>
-          <a:bodyPr wrap="square">
-            <a:spAutoFit/>
-          </a:bodyPr>
-          <a:lstStyle/>
-          <a:p>
-            <a:pPr marL="0" indent="0">
-              <a:spcBef>
-                <a:spcPts val="800"/>
-              </a:spcBef>
+              <a:t>●   G1 bounds how long a captured, later-resent frame stays useful. G2 rejects a byte-identical resend outright.</a:t>
+            </a:r>
+          </a:p>
+          <a:p>
+            <a:pPr>
               <a:spcAft>
-                <a:spcPts val="400"/>
+                <a:spcPts val="1100"/>
               </a:spcAft>
-              <a:buNone/>
             </a:pPr>
             <a:r>
-              <a:rPr lang="en-US" sz="1750" b="1" dirty="0">
+              <a:rPr sz="1700">
                 <a:solidFill>
                   <a:srgbClr val="0B0B0B"/>
                 </a:solidFill>
                 <a:latin typeface="Calibri"/>
               </a:rPr>
-              <a:t>Classical distance bound from round-trip time [4], [5]</a:t>
-            </a:r>
-          </a:p>
-          <a:p>
-            <a:pPr marL="228600" indent="0">
+              <a:t>●   Neither mechanism examines WHEN a frame arrived — only whether its nonce is fresh and previously unseen</a:t>
+            </a:r>
+          </a:p>
+          <a:p>
+            <a:pPr>
               <a:spcAft>
-                <a:spcPts val="300"/>
+                <a:spcPts val="1100"/>
               </a:spcAft>
-              <a:buNone/>
             </a:pPr>
             <a:r>
-              <a:rPr lang="en-US" sz="1800" i="1" dirty="0">
-                <a:solidFill>
-                  <a:srgbClr val="1F3864"/>
-                </a:solidFill>
-                <a:latin typeface="Cambria Math"/>
-              </a:rPr>
-              <a:t>d ≤ c · ( t_RTT − t_proc ) / 2</a:t>
-            </a:r>
-          </a:p>
-          <a:p>
-            <a:pPr marL="228600" indent="0">
+              <a:rPr sz="1700">
+                <a:solidFill>
+                  <a:srgbClr val="0B0B0B"/>
+                </a:solidFill>
+                <a:latin typeface="Calibri"/>
+              </a:rPr>
+              <a:t>●   A live relay forwarding genuinely fresh frames in real time passes every check the receiver performs:</a:t>
+            </a:r>
+          </a:p>
+          <a:p>
+            <a:pPr lvl="1">
               <a:spcAft>
-                <a:spcPts val="600"/>
+                <a:spcPts val="700"/>
               </a:spcAft>
-              <a:buNone/>
             </a:pPr>
             <a:r>
-              <a:rPr lang="en-US" sz="1500" dirty="0">
+              <a:rPr sz="1450">
                 <a:solidFill>
                   <a:srgbClr val="52514E"/>
                 </a:solidFill>
                 <a:latin typeface="Calibri"/>
               </a:rPr>
-              <a:t>This bounds distance only when timing resolution is small relative to c. At Pico-class resolution it is not a distance bound — it is a latency bound. Stated here so the distinction is explicit.</a:t>
-            </a:r>
-          </a:p>
-          <a:p>
-            <a:pPr marL="0" indent="0">
-              <a:spcBef>
-                <a:spcPts val="800"/>
-              </a:spcBef>
+              <a:t>‒   Nonce never seen before → G2 passes</a:t>
+            </a:r>
+          </a:p>
+          <a:p>
+            <a:pPr lvl="1">
               <a:spcAft>
-                <a:spcPts val="400"/>
+                <a:spcPts val="700"/>
               </a:spcAft>
-              <a:buNone/>
             </a:pPr>
             <a:r>
-              <a:rPr lang="en-US" sz="1750" b="1" dirty="0">
+              <a:rPr sz="1450">
+                <a:solidFill>
+                  <a:srgbClr val="52514E"/>
+                </a:solidFill>
+                <a:latin typeface="Calibri"/>
+              </a:rPr>
+              <a:t>‒   GCM tag valid, ciphertext untouched → confidentiality/integrity passes</a:t>
+            </a:r>
+          </a:p>
+          <a:p>
+            <a:pPr lvl="1">
+              <a:spcAft>
+                <a:spcPts val="700"/>
+              </a:spcAft>
+            </a:pPr>
+            <a:r>
+              <a:rPr sz="1450">
+                <a:solidFill>
+                  <a:srgbClr val="52514E"/>
+                </a:solidFill>
+                <a:latin typeface="Calibri"/>
+              </a:rPr>
+              <a:t>‒   t_last continuously refreshed by relayed-but-fresh frames → G1 passes</a:t>
+            </a:r>
+          </a:p>
+          <a:p>
+            <a:pPr>
+              <a:spcAft>
+                <a:spcPts val="1100"/>
+              </a:spcAft>
+            </a:pPr>
+            <a:r>
+              <a:rPr sz="1700">
                 <a:solidFill>
                   <a:srgbClr val="0B0B0B"/>
                 </a:solidFill>
                 <a:latin typeface="Calibri"/>
               </a:rPr>
-              <a:t>Acceptance predicate as implemented</a:t>
-            </a:r>
-          </a:p>
-          <a:p>
-            <a:pPr marL="228600" indent="0">
+              <a:t>●   Verified directly in the receiver implementation: the LiFi data-frame path checks only CRC and byte-exact nonce identity — no timestamp, no round-trip bound</a:t>
+            </a:r>
+          </a:p>
+          <a:p>
+            <a:pPr>
               <a:spcAft>
-                <a:spcPts val="300"/>
+                <a:spcPts val="1100"/>
               </a:spcAft>
-              <a:buNone/>
             </a:pPr>
             <a:r>
-              <a:rPr lang="en-US" sz="1800" i="1" dirty="0">
-                <a:solidFill>
-                  <a:srgbClr val="1F3864"/>
-                </a:solidFill>
-                <a:latin typeface="Cambria Math"/>
-              </a:rPr>
-              <a:t>Accept ⇔ MACₖ(B) valid  ∧  | t_now − t_B | ≤ W  ∧  N ∉ Seen  ∧  RTT ≤ Δ</a:t>
-            </a:r>
-          </a:p>
-          <a:p>
-            <a:pPr marL="0" indent="0">
-              <a:spcBef>
-                <a:spcPts val="800"/>
-              </a:spcBef>
-              <a:spcAft>
-                <a:spcPts val="400"/>
-              </a:spcAft>
-              <a:buNone/>
-            </a:pPr>
-            <a:r>
-              <a:rPr lang="en-US" sz="1750" b="1" dirty="0">
+              <a:rPr sz="1700">
                 <a:solidFill>
                   <a:srgbClr val="0B0B0B"/>
                 </a:solidFill>
                 <a:latin typeface="Calibri"/>
               </a:rPr>
-              <a:t>The G3 condition</a:t>
-            </a:r>
-          </a:p>
-          <a:p>
-            <a:pPr marL="228600" indent="0">
-              <a:spcAft>
-                <a:spcPts val="300"/>
-              </a:spcAft>
-              <a:buNone/>
-            </a:pPr>
-            <a:r>
-              <a:rPr lang="en-US" sz="1800" i="1" dirty="0">
-                <a:solidFill>
-                  <a:srgbClr val="1F3864"/>
-                </a:solidFill>
-                <a:latin typeface="Cambria Math"/>
-              </a:rPr>
-              <a:t>G3 holds ⇔ Δ &lt; L_relay      where L_relay = min feasible relay latency</a:t>
-            </a:r>
-          </a:p>
-          <a:p>
-            <a:pPr marL="228600" indent="0">
-              <a:spcAft>
-                <a:spcPts val="600"/>
-              </a:spcAft>
-              <a:buNone/>
-            </a:pPr>
-            <a:r>
-              <a:rPr lang="en-US" sz="1500" dirty="0">
-                <a:solidFill>
-                  <a:srgbClr val="52514E"/>
-                </a:solidFill>
-                <a:latin typeface="Calibri"/>
-              </a:rPr>
-              <a:t>Decode-and-forward relays report L_relay ≈ 200–500 ms [6]; any Δ below that is rejected. Amplify-and-forward relays drive L_relay toward zero, so no achievable Δ detects them [7] — the optical geometry of the previous slide, not the timing bound, is what raises their cost.</a:t>
-            </a:r>
-          </a:p>
-          <a:p>
-            <a:pPr marL="0" indent="0">
-              <a:spcBef>
-                <a:spcPts val="800"/>
-              </a:spcBef>
-              <a:spcAft>
-                <a:spcPts val="400"/>
-              </a:spcAft>
-              <a:buNone/>
-            </a:pPr>
-            <a:r>
-              <a:rPr lang="en-US" sz="1750" b="1" dirty="0">
-                <a:solidFill>
-                  <a:srgbClr val="0B0B0B"/>
-                </a:solidFill>
-                <a:latin typeface="Calibri"/>
-              </a:rPr>
-              <a:t>Why the two defenses are a pair, not a redundancy</a:t>
-            </a:r>
-          </a:p>
-          <a:p>
-            <a:pPr marL="228600" indent="0">
-              <a:spcAft>
-                <a:spcPts val="600"/>
-              </a:spcAft>
-              <a:buNone/>
-            </a:pPr>
-            <a:r>
-              <a:rPr lang="en-US" sz="1500" dirty="0">
-                <a:solidFill>
-                  <a:srgbClr val="52514E"/>
-                </a:solidFill>
-                <a:latin typeface="Calibri"/>
-              </a:rPr>
-              <a:t>Timing (Δ) closes the digital-relay path; the bounded cone V closes the physical-reach path. Neither is sufficient alone.</a:t>
-            </a:r>
-          </a:p>
-          <a:p>
-            <a:pPr marL="0" indent="0">
-              <a:spcBef>
-                <a:spcPts val="900"/>
-              </a:spcBef>
-              <a:buNone/>
-            </a:pPr>
-            <a:r>
-              <a:rPr lang="en-US" sz="1500" b="1" i="1" dirty="0">
-                <a:solidFill>
-                  <a:srgbClr val="1F3864"/>
-                </a:solidFill>
-                <a:latin typeface="Calibri"/>
-              </a:rPr>
-              <a:t>Provenance: </a:t>
-            </a:r>
-            <a:r>
-              <a:rPr lang="en-US" sz="1500" i="1" dirty="0">
-                <a:solidFill>
-                  <a:srgbClr val="52514E"/>
-                </a:solidFill>
-                <a:latin typeface="Calibri"/>
-              </a:rPr>
-              <a:t>the RTT distance bound is due to [4], [5]; relay-latency figures are from [6], [7]. The acceptance predicate and the G3 condition are this work’s formulation.</a:t>
+              <a:t>●   What closing this gap requires: a Brands–Chaum-style distance-bounding challenge-response, binding authorization to measured round-trip time</a:t>
             </a:r>
           </a:p>
         </p:txBody>
       </p:sp>
       <p:pic>
         <p:nvPicPr>
-          <p:cNvPr id="7" name="Picture 6" descr="A white background with text&#10;&#10;AI-generated content may be incorrect.">
+          <p:cNvPr id="4" name="Picture 3" descr="A white background with text&#10;&#10;AI-generated content may be incorrect.">
             <a:extLst>
               <a:ext uri="{FF2B5EF4-FFF2-40B4-BE49-F238E27FC236}">
-                <a16:creationId xmlns:a16="http://schemas.microsoft.com/office/drawing/2014/main" id="{E815CBF9-8B4C-C24C-1249-0A42B9A5F6CF}"/>
+                <a16:creationId xmlns:a16="http://schemas.microsoft.com/office/drawing/2014/main" id="{0BB6CE34-40C2-0B05-8971-B7281C4F44AB}"/>
               </a:ext>
             </a:extLst>
           </p:cNvPr>
@@ -15282,10 +15274,10 @@
       </p:pic>
       <p:sp>
         <p:nvSpPr>
-          <p:cNvPr id="8" name="Rectangle 7">
+          <p:cNvPr id="5" name="Rectangle 4">
             <a:extLst>
               <a:ext uri="{FF2B5EF4-FFF2-40B4-BE49-F238E27FC236}">
-                <a16:creationId xmlns:a16="http://schemas.microsoft.com/office/drawing/2014/main" id="{1D78EB68-6E49-6E62-6807-621A767964CE}"/>
+                <a16:creationId xmlns:a16="http://schemas.microsoft.com/office/drawing/2014/main" id="{B3523F97-9585-DF87-5CEF-7FE7F49B935D}"/>
               </a:ext>
             </a:extLst>
           </p:cNvPr>
@@ -15342,11 +15334,6 @@
         </p:txBody>
       </p:sp>
     </p:spTree>
-    <p:extLst>
-      <p:ext uri="{BB962C8B-B14F-4D97-AF65-F5344CB8AC3E}">
-        <p14:creationId xmlns:p14="http://schemas.microsoft.com/office/powerpoint/2010/main" val="1851031038"/>
-      </p:ext>
-    </p:extLst>
   </p:cSld>
   <p:clrMapOvr>
     <a:masterClrMapping/>
@@ -15355,315 +15342,6 @@
 </file>
 
 <file path=ppt/slides/slide24.xml><?xml version="1.0" encoding="utf-8"?>
-<p:sld xmlns:a="http://schemas.openxmlformats.org/drawingml/2006/main" xmlns:r="http://schemas.openxmlformats.org/officeDocument/2006/relationships" xmlns:p="http://schemas.openxmlformats.org/presentationml/2006/main">
-  <p:cSld>
-    <p:bg>
-      <p:bgPr>
-        <a:solidFill>
-          <a:srgbClr val="FCFCFB"/>
-        </a:solidFill>
-        <a:effectLst/>
-      </p:bgPr>
-    </p:bg>
-    <p:spTree>
-      <p:nvGrpSpPr>
-        <p:cNvPr id="1" name=""/>
-        <p:cNvGrpSpPr/>
-        <p:nvPr/>
-      </p:nvGrpSpPr>
-      <p:grpSpPr>
-        <a:xfrm>
-          <a:off x="0" y="0"/>
-          <a:ext cx="0" cy="0"/>
-          <a:chOff x="0" y="0"/>
-          <a:chExt cx="0" cy="0"/>
-        </a:xfrm>
-      </p:grpSpPr>
-      <p:sp>
-        <p:nvSpPr>
-          <p:cNvPr id="2" name="TextBox 1"/>
-          <p:cNvSpPr txBox="1"/>
-          <p:nvPr/>
-        </p:nvSpPr>
-        <p:spPr>
-          <a:xfrm>
-            <a:off x="502920" y="777240"/>
-            <a:ext cx="11155680" cy="822960"/>
-          </a:xfrm>
-          <a:prstGeom prst="rect">
-            <a:avLst/>
-          </a:prstGeom>
-          <a:noFill/>
-        </p:spPr>
-        <p:txBody>
-          <a:bodyPr wrap="square">
-            <a:spAutoFit/>
-          </a:bodyPr>
-          <a:lstStyle/>
-          <a:p>
-            <a:r>
-              <a:rPr sz="2900" b="1">
-                <a:solidFill>
-                  <a:srgbClr val="0B0B0B"/>
-                </a:solidFill>
-                <a:latin typeface="Calibri"/>
-              </a:rPr>
-              <a:t>G3 — A Named Limitation, Not a Discovered Gap</a:t>
-            </a:r>
-          </a:p>
-        </p:txBody>
-      </p:sp>
-      <p:sp>
-        <p:nvSpPr>
-          <p:cNvPr id="3" name="TextBox 2"/>
-          <p:cNvSpPr txBox="1"/>
-          <p:nvPr/>
-        </p:nvSpPr>
-        <p:spPr>
-          <a:xfrm>
-            <a:off x="685800" y="1600200"/>
-            <a:ext cx="10789920" cy="4572000"/>
-          </a:xfrm>
-          <a:prstGeom prst="rect">
-            <a:avLst/>
-          </a:prstGeom>
-          <a:noFill/>
-        </p:spPr>
-        <p:txBody>
-          <a:bodyPr wrap="square">
-            <a:spAutoFit/>
-          </a:bodyPr>
-          <a:lstStyle/>
-          <a:p>
-            <a:pPr>
-              <a:spcAft>
-                <a:spcPts val="1100"/>
-              </a:spcAft>
-            </a:pPr>
-            <a:r>
-              <a:rPr sz="1700">
-                <a:solidFill>
-                  <a:srgbClr val="0B0B0B"/>
-                </a:solidFill>
-                <a:latin typeface="Calibri"/>
-              </a:rPr>
-              <a:t>●   G1 bounds how long a captured, later-resent frame stays useful. G2 rejects a byte-identical resend outright.</a:t>
-            </a:r>
-          </a:p>
-          <a:p>
-            <a:pPr>
-              <a:spcAft>
-                <a:spcPts val="1100"/>
-              </a:spcAft>
-            </a:pPr>
-            <a:r>
-              <a:rPr sz="1700">
-                <a:solidFill>
-                  <a:srgbClr val="0B0B0B"/>
-                </a:solidFill>
-                <a:latin typeface="Calibri"/>
-              </a:rPr>
-              <a:t>●   Neither mechanism examines WHEN a frame arrived — only whether its nonce is fresh and previously unseen</a:t>
-            </a:r>
-          </a:p>
-          <a:p>
-            <a:pPr>
-              <a:spcAft>
-                <a:spcPts val="1100"/>
-              </a:spcAft>
-            </a:pPr>
-            <a:r>
-              <a:rPr sz="1700">
-                <a:solidFill>
-                  <a:srgbClr val="0B0B0B"/>
-                </a:solidFill>
-                <a:latin typeface="Calibri"/>
-              </a:rPr>
-              <a:t>●   A live relay forwarding genuinely fresh frames in real time passes every check the receiver performs:</a:t>
-            </a:r>
-          </a:p>
-          <a:p>
-            <a:pPr lvl="1">
-              <a:spcAft>
-                <a:spcPts val="700"/>
-              </a:spcAft>
-            </a:pPr>
-            <a:r>
-              <a:rPr sz="1450">
-                <a:solidFill>
-                  <a:srgbClr val="52514E"/>
-                </a:solidFill>
-                <a:latin typeface="Calibri"/>
-              </a:rPr>
-              <a:t>‒   Nonce never seen before → G2 passes</a:t>
-            </a:r>
-          </a:p>
-          <a:p>
-            <a:pPr lvl="1">
-              <a:spcAft>
-                <a:spcPts val="700"/>
-              </a:spcAft>
-            </a:pPr>
-            <a:r>
-              <a:rPr sz="1450">
-                <a:solidFill>
-                  <a:srgbClr val="52514E"/>
-                </a:solidFill>
-                <a:latin typeface="Calibri"/>
-              </a:rPr>
-              <a:t>‒   GCM tag valid, ciphertext untouched → confidentiality/integrity passes</a:t>
-            </a:r>
-          </a:p>
-          <a:p>
-            <a:pPr lvl="1">
-              <a:spcAft>
-                <a:spcPts val="700"/>
-              </a:spcAft>
-            </a:pPr>
-            <a:r>
-              <a:rPr sz="1450">
-                <a:solidFill>
-                  <a:srgbClr val="52514E"/>
-                </a:solidFill>
-                <a:latin typeface="Calibri"/>
-              </a:rPr>
-              <a:t>‒   t_last continuously refreshed by relayed-but-fresh frames → G1 passes</a:t>
-            </a:r>
-          </a:p>
-          <a:p>
-            <a:pPr>
-              <a:spcAft>
-                <a:spcPts val="1100"/>
-              </a:spcAft>
-            </a:pPr>
-            <a:r>
-              <a:rPr sz="1700">
-                <a:solidFill>
-                  <a:srgbClr val="0B0B0B"/>
-                </a:solidFill>
-                <a:latin typeface="Calibri"/>
-              </a:rPr>
-              <a:t>●   Verified directly in the receiver implementation: the LiFi data-frame path checks only CRC and byte-exact nonce identity — no timestamp, no round-trip bound</a:t>
-            </a:r>
-          </a:p>
-          <a:p>
-            <a:pPr>
-              <a:spcAft>
-                <a:spcPts val="1100"/>
-              </a:spcAft>
-            </a:pPr>
-            <a:r>
-              <a:rPr sz="1700">
-                <a:solidFill>
-                  <a:srgbClr val="0B0B0B"/>
-                </a:solidFill>
-                <a:latin typeface="Calibri"/>
-              </a:rPr>
-              <a:t>●   What closing this gap requires: a Brands–Chaum-style distance-bounding challenge-response, binding authorization to measured round-trip time</a:t>
-            </a:r>
-          </a:p>
-        </p:txBody>
-      </p:sp>
-      <p:pic>
-        <p:nvPicPr>
-          <p:cNvPr id="4" name="Picture 3" descr="A white background with text&#10;&#10;AI-generated content may be incorrect.">
-            <a:extLst>
-              <a:ext uri="{FF2B5EF4-FFF2-40B4-BE49-F238E27FC236}">
-                <a16:creationId xmlns:a16="http://schemas.microsoft.com/office/drawing/2014/main" id="{0BB6CE34-40C2-0B05-8971-B7281C4F44AB}"/>
-              </a:ext>
-            </a:extLst>
-          </p:cNvPr>
-          <p:cNvPicPr>
-            <a:picLocks noChangeAspect="1"/>
-          </p:cNvPicPr>
-          <p:nvPr/>
-        </p:nvPicPr>
-        <p:blipFill>
-          <a:blip r:embed="rId3"/>
-          <a:stretch>
-            <a:fillRect/>
-          </a:stretch>
-        </p:blipFill>
-        <p:spPr>
-          <a:xfrm>
-            <a:off x="9545121" y="-4718"/>
-            <a:ext cx="2646879" cy="1477328"/>
-          </a:xfrm>
-          <a:prstGeom prst="rect">
-            <a:avLst/>
-          </a:prstGeom>
-        </p:spPr>
-      </p:pic>
-      <p:sp>
-        <p:nvSpPr>
-          <p:cNvPr id="5" name="Rectangle 4">
-            <a:extLst>
-              <a:ext uri="{FF2B5EF4-FFF2-40B4-BE49-F238E27FC236}">
-                <a16:creationId xmlns:a16="http://schemas.microsoft.com/office/drawing/2014/main" id="{B3523F97-9585-DF87-5CEF-7FE7F49B935D}"/>
-              </a:ext>
-            </a:extLst>
-          </p:cNvPr>
-          <p:cNvSpPr/>
-          <p:nvPr/>
-        </p:nvSpPr>
-        <p:spPr>
-          <a:xfrm>
-            <a:off x="0" y="0"/>
-            <a:ext cx="9545121" cy="517206"/>
-          </a:xfrm>
-          <a:prstGeom prst="rect">
-            <a:avLst/>
-          </a:prstGeom>
-          <a:solidFill>
-            <a:srgbClr val="ECBE44"/>
-          </a:solidFill>
-          <a:ln>
-            <a:solidFill>
-              <a:schemeClr val="bg1"/>
-            </a:solidFill>
-          </a:ln>
-        </p:spPr>
-        <p:style>
-          <a:lnRef idx="2">
-            <a:schemeClr val="accent1">
-              <a:shade val="15000"/>
-            </a:schemeClr>
-          </a:lnRef>
-          <a:fillRef idx="1">
-            <a:schemeClr val="accent1"/>
-          </a:fillRef>
-          <a:effectRef idx="0">
-            <a:schemeClr val="accent1"/>
-          </a:effectRef>
-          <a:fontRef idx="minor">
-            <a:schemeClr val="lt1"/>
-          </a:fontRef>
-        </p:style>
-        <p:txBody>
-          <a:bodyPr rtlCol="0" anchor="ctr"/>
-          <a:lstStyle/>
-          <a:p>
-            <a:pPr algn="ctr"/>
-            <a:endParaRPr lang="en-US" dirty="0">
-              <a:solidFill>
-                <a:srgbClr val="FF0000"/>
-              </a:solidFill>
-              <a:highlight>
-                <a:srgbClr val="FFFF00"/>
-              </a:highlight>
-            </a:endParaRPr>
-          </a:p>
-        </p:txBody>
-      </p:sp>
-    </p:spTree>
-  </p:cSld>
-  <p:clrMapOvr>
-    <a:masterClrMapping/>
-  </p:clrMapOvr>
-</p:sld>
-</file>
-
-<file path=ppt/slides/slide25.xml><?xml version="1.0" encoding="utf-8"?>
 <p:sld xmlns:a="http://schemas.openxmlformats.org/drawingml/2006/main" xmlns:r="http://schemas.openxmlformats.org/officeDocument/2006/relationships" xmlns:p="http://schemas.openxmlformats.org/presentationml/2006/main">
   <p:cSld>
     <p:bg>
@@ -16368,7 +16046,7 @@
 </p:sld>
 </file>
 
-<file path=ppt/slides/slide26.xml><?xml version="1.0" encoding="utf-8"?>
+<file path=ppt/slides/slide25.xml><?xml version="1.0" encoding="utf-8"?>
 <p:sld xmlns:a="http://schemas.openxmlformats.org/drawingml/2006/main" xmlns:r="http://schemas.openxmlformats.org/officeDocument/2006/relationships" xmlns:p="http://schemas.openxmlformats.org/presentationml/2006/main">
   <p:cSld>
     <p:bg>
@@ -16645,7 +16323,7 @@
 </p:sld>
 </file>
 
-<file path=ppt/slides/slide27.xml><?xml version="1.0" encoding="utf-8"?>
+<file path=ppt/slides/slide26.xml><?xml version="1.0" encoding="utf-8"?>
 <p:sld xmlns:a="http://schemas.openxmlformats.org/drawingml/2006/main" xmlns:r="http://schemas.openxmlformats.org/officeDocument/2006/relationships" xmlns:p="http://schemas.openxmlformats.org/presentationml/2006/main">
   <p:cSld>
     <p:bg>
@@ -17063,7 +16741,7 @@
 </p:sld>
 </file>
 
-<file path=ppt/slides/slide28.xml><?xml version="1.0" encoding="utf-8"?>
+<file path=ppt/slides/slide27.xml><?xml version="1.0" encoding="utf-8"?>
 <p:sld xmlns:a="http://schemas.openxmlformats.org/drawingml/2006/main" xmlns:r="http://schemas.openxmlformats.org/officeDocument/2006/relationships" xmlns:p="http://schemas.openxmlformats.org/presentationml/2006/main">
   <p:cSld>
     <p:bg>
@@ -17340,7 +17018,7 @@
 </p:sld>
 </file>
 
-<file path=ppt/slides/slide29.xml><?xml version="1.0" encoding="utf-8"?>
+<file path=ppt/slides/slide28.xml><?xml version="1.0" encoding="utf-8"?>
 <p:sld xmlns:a="http://schemas.openxmlformats.org/drawingml/2006/main" xmlns:r="http://schemas.openxmlformats.org/officeDocument/2006/relationships" xmlns:p="http://schemas.openxmlformats.org/presentationml/2006/main">
   <p:cSld>
     <p:spTree>
@@ -17695,6 +17373,162 @@
         <p14:creationId xmlns:p14="http://schemas.microsoft.com/office/powerpoint/2010/main" val="636103872"/>
       </p:ext>
     </p:extLst>
+  </p:cSld>
+  <p:clrMapOvr>
+    <a:masterClrMapping/>
+  </p:clrMapOvr>
+</p:sld>
+</file>
+
+<file path=ppt/slides/slide29.xml><?xml version="1.0" encoding="utf-8"?>
+<p:sld xmlns:a="http://schemas.openxmlformats.org/drawingml/2006/main" xmlns:r="http://schemas.openxmlformats.org/officeDocument/2006/relationships" xmlns:p="http://schemas.openxmlformats.org/presentationml/2006/main">
+  <p:cSld>
+    <p:bg>
+      <p:bgPr>
+        <a:solidFill>
+          <a:srgbClr val="FCFCFB"/>
+        </a:solidFill>
+        <a:effectLst/>
+      </p:bgPr>
+    </p:bg>
+    <p:spTree>
+      <p:nvGrpSpPr>
+        <p:cNvPr id="1" name=""/>
+        <p:cNvGrpSpPr/>
+        <p:nvPr/>
+      </p:nvGrpSpPr>
+      <p:grpSpPr>
+        <a:xfrm>
+          <a:off x="0" y="0"/>
+          <a:ext cx="0" cy="0"/>
+          <a:chOff x="0" y="0"/>
+          <a:chExt cx="0" cy="0"/>
+        </a:xfrm>
+      </p:grpSpPr>
+      <p:sp>
+        <p:nvSpPr>
+          <p:cNvPr id="2" name="Rectangle 1"/>
+          <p:cNvSpPr/>
+          <p:nvPr/>
+        </p:nvSpPr>
+        <p:spPr>
+          <a:xfrm>
+            <a:off x="0" y="0"/>
+            <a:ext cx="12191695" cy="6858000"/>
+          </a:xfrm>
+          <a:prstGeom prst="rect">
+            <a:avLst/>
+          </a:prstGeom>
+          <a:solidFill>
+            <a:srgbClr val="0B0B0B"/>
+          </a:solidFill>
+          <a:ln>
+            <a:noFill/>
+          </a:ln>
+        </p:spPr>
+        <p:style>
+          <a:lnRef idx="1">
+            <a:schemeClr val="accent1"/>
+          </a:lnRef>
+          <a:fillRef idx="3">
+            <a:schemeClr val="accent1"/>
+          </a:fillRef>
+          <a:effectRef idx="2">
+            <a:schemeClr val="accent1"/>
+          </a:effectRef>
+          <a:fontRef idx="minor">
+            <a:schemeClr val="lt1"/>
+          </a:fontRef>
+        </p:style>
+        <p:txBody>
+          <a:bodyPr rtlCol="0" anchor="ctr"/>
+          <a:lstStyle/>
+          <a:p>
+            <a:pPr algn="ctr"/>
+            <a:endParaRPr/>
+          </a:p>
+        </p:txBody>
+      </p:sp>
+      <p:sp>
+        <p:nvSpPr>
+          <p:cNvPr id="3" name="TextBox 2"/>
+          <p:cNvSpPr txBox="1"/>
+          <p:nvPr/>
+        </p:nvSpPr>
+        <p:spPr>
+          <a:xfrm>
+            <a:off x="914400" y="2560320"/>
+            <a:ext cx="10332720" cy="1097280"/>
+          </a:xfrm>
+          <a:prstGeom prst="rect">
+            <a:avLst/>
+          </a:prstGeom>
+          <a:noFill/>
+        </p:spPr>
+        <p:txBody>
+          <a:bodyPr wrap="none">
+            <a:spAutoFit/>
+          </a:bodyPr>
+          <a:lstStyle/>
+          <a:p>
+            <a:r>
+              <a:rPr sz="4000" b="1">
+                <a:solidFill>
+                  <a:srgbClr val="FFFFFF"/>
+                </a:solidFill>
+                <a:latin typeface="Calibri"/>
+              </a:rPr>
+              <a:t>Thank you — Questions</a:t>
+            </a:r>
+          </a:p>
+        </p:txBody>
+      </p:sp>
+      <p:sp>
+        <p:nvSpPr>
+          <p:cNvPr id="4" name="TextBox 3"/>
+          <p:cNvSpPr txBox="1"/>
+          <p:nvPr/>
+        </p:nvSpPr>
+        <p:spPr>
+          <a:xfrm>
+            <a:off x="914400" y="3429000"/>
+            <a:ext cx="10332720" cy="1371600"/>
+          </a:xfrm>
+          <a:prstGeom prst="rect">
+            <a:avLst/>
+          </a:prstGeom>
+          <a:noFill/>
+        </p:spPr>
+        <p:txBody>
+          <a:bodyPr wrap="square">
+            <a:spAutoFit/>
+          </a:bodyPr>
+          <a:lstStyle/>
+          <a:p>
+            <a:r>
+              <a:rPr sz="1500">
+                <a:solidFill>
+                  <a:srgbClr val="C3C2B7"/>
+                </a:solidFill>
+                <a:latin typeface="Calibri"/>
+              </a:rPr>
+              <a:t>Jose Felix · KIM Labs, Arizona State University</a:t>
+            </a:r>
+          </a:p>
+          <a:p>
+            <a:r>
+              <a:rPr sz="1300">
+                <a:solidFill>
+                  <a:srgbClr val="898781"/>
+                </a:solidFill>
+                <a:latin typeface="Calibri"/>
+              </a:rPr>
+              <a:t>github.com/asu-kim/lifi-auth</a:t>
+            </a:r>
+          </a:p>
+        </p:txBody>
+      </p:sp>
+    </p:spTree>
   </p:cSld>
   <p:clrMapOvr>
     <a:masterClrMapping/>
@@ -18305,162 +18139,6 @@
         </p:nvSpPr>
         <p:spPr>
           <a:xfrm>
-            <a:off x="914400" y="2560320"/>
-            <a:ext cx="10332720" cy="1097280"/>
-          </a:xfrm>
-          <a:prstGeom prst="rect">
-            <a:avLst/>
-          </a:prstGeom>
-          <a:noFill/>
-        </p:spPr>
-        <p:txBody>
-          <a:bodyPr wrap="none">
-            <a:spAutoFit/>
-          </a:bodyPr>
-          <a:lstStyle/>
-          <a:p>
-            <a:r>
-              <a:rPr sz="4000" b="1">
-                <a:solidFill>
-                  <a:srgbClr val="FFFFFF"/>
-                </a:solidFill>
-                <a:latin typeface="Calibri"/>
-              </a:rPr>
-              <a:t>Thank you — Questions</a:t>
-            </a:r>
-          </a:p>
-        </p:txBody>
-      </p:sp>
-      <p:sp>
-        <p:nvSpPr>
-          <p:cNvPr id="4" name="TextBox 3"/>
-          <p:cNvSpPr txBox="1"/>
-          <p:nvPr/>
-        </p:nvSpPr>
-        <p:spPr>
-          <a:xfrm>
-            <a:off x="914400" y="3429000"/>
-            <a:ext cx="10332720" cy="1371600"/>
-          </a:xfrm>
-          <a:prstGeom prst="rect">
-            <a:avLst/>
-          </a:prstGeom>
-          <a:noFill/>
-        </p:spPr>
-        <p:txBody>
-          <a:bodyPr wrap="square">
-            <a:spAutoFit/>
-          </a:bodyPr>
-          <a:lstStyle/>
-          <a:p>
-            <a:r>
-              <a:rPr sz="1500">
-                <a:solidFill>
-                  <a:srgbClr val="C3C2B7"/>
-                </a:solidFill>
-                <a:latin typeface="Calibri"/>
-              </a:rPr>
-              <a:t>Jose Felix · KIM Labs, Arizona State University</a:t>
-            </a:r>
-          </a:p>
-          <a:p>
-            <a:r>
-              <a:rPr sz="1300">
-                <a:solidFill>
-                  <a:srgbClr val="898781"/>
-                </a:solidFill>
-                <a:latin typeface="Calibri"/>
-              </a:rPr>
-              <a:t>github.com/asu-kim/lifi-auth</a:t>
-            </a:r>
-          </a:p>
-        </p:txBody>
-      </p:sp>
-    </p:spTree>
-  </p:cSld>
-  <p:clrMapOvr>
-    <a:masterClrMapping/>
-  </p:clrMapOvr>
-</p:sld>
-</file>
-
-<file path=ppt/slides/slide31.xml><?xml version="1.0" encoding="utf-8"?>
-<p:sld xmlns:a="http://schemas.openxmlformats.org/drawingml/2006/main" xmlns:r="http://schemas.openxmlformats.org/officeDocument/2006/relationships" xmlns:p="http://schemas.openxmlformats.org/presentationml/2006/main">
-  <p:cSld>
-    <p:bg>
-      <p:bgPr>
-        <a:solidFill>
-          <a:srgbClr val="FCFCFB"/>
-        </a:solidFill>
-        <a:effectLst/>
-      </p:bgPr>
-    </p:bg>
-    <p:spTree>
-      <p:nvGrpSpPr>
-        <p:cNvPr id="1" name=""/>
-        <p:cNvGrpSpPr/>
-        <p:nvPr/>
-      </p:nvGrpSpPr>
-      <p:grpSpPr>
-        <a:xfrm>
-          <a:off x="0" y="0"/>
-          <a:ext cx="0" cy="0"/>
-          <a:chOff x="0" y="0"/>
-          <a:chExt cx="0" cy="0"/>
-        </a:xfrm>
-      </p:grpSpPr>
-      <p:sp>
-        <p:nvSpPr>
-          <p:cNvPr id="2" name="Rectangle 1"/>
-          <p:cNvSpPr/>
-          <p:nvPr/>
-        </p:nvSpPr>
-        <p:spPr>
-          <a:xfrm>
-            <a:off x="0" y="0"/>
-            <a:ext cx="12191695" cy="6858000"/>
-          </a:xfrm>
-          <a:prstGeom prst="rect">
-            <a:avLst/>
-          </a:prstGeom>
-          <a:solidFill>
-            <a:srgbClr val="0B0B0B"/>
-          </a:solidFill>
-          <a:ln>
-            <a:noFill/>
-          </a:ln>
-        </p:spPr>
-        <p:style>
-          <a:lnRef idx="1">
-            <a:schemeClr val="accent1"/>
-          </a:lnRef>
-          <a:fillRef idx="3">
-            <a:schemeClr val="accent1"/>
-          </a:fillRef>
-          <a:effectRef idx="2">
-            <a:schemeClr val="accent1"/>
-          </a:effectRef>
-          <a:fontRef idx="minor">
-            <a:schemeClr val="lt1"/>
-          </a:fontRef>
-        </p:style>
-        <p:txBody>
-          <a:bodyPr rtlCol="0" anchor="ctr"/>
-          <a:lstStyle/>
-          <a:p>
-            <a:pPr algn="ctr"/>
-            <a:endParaRPr/>
-          </a:p>
-        </p:txBody>
-      </p:sp>
-      <p:sp>
-        <p:nvSpPr>
-          <p:cNvPr id="3" name="TextBox 2"/>
-          <p:cNvSpPr txBox="1"/>
-          <p:nvPr/>
-        </p:nvSpPr>
-        <p:spPr>
-          <a:xfrm>
             <a:off x="914400" y="2743200"/>
             <a:ext cx="10332720" cy="1097280"/>
           </a:xfrm>
@@ -18529,7 +18207,7 @@
 </p:sld>
 </file>
 
-<file path=ppt/slides/slide32.xml><?xml version="1.0" encoding="utf-8"?>
+<file path=ppt/slides/slide31.xml><?xml version="1.0" encoding="utf-8"?>
 <p:sld xmlns:a="http://schemas.openxmlformats.org/drawingml/2006/main" xmlns:r="http://schemas.openxmlformats.org/officeDocument/2006/relationships" xmlns:p="http://schemas.openxmlformats.org/presentationml/2006/main">
   <p:cSld>
     <p:bg>
@@ -19739,7 +19417,7 @@
 </p:sld>
 </file>
 
-<file path=ppt/slides/slide33.xml><?xml version="1.0" encoding="utf-8"?>
+<file path=ppt/slides/slide32.xml><?xml version="1.0" encoding="utf-8"?>
 <p:sld xmlns:a="http://schemas.openxmlformats.org/drawingml/2006/main" xmlns:r="http://schemas.openxmlformats.org/officeDocument/2006/relationships" xmlns:p="http://schemas.openxmlformats.org/presentationml/2006/main">
   <p:cSld>
     <p:bg>
@@ -20494,7 +20172,7 @@
 </p:sld>
 </file>
 
-<file path=ppt/slides/slide34.xml><?xml version="1.0" encoding="utf-8"?>
+<file path=ppt/slides/slide33.xml><?xml version="1.0" encoding="utf-8"?>
 <p:sld xmlns:a="http://schemas.openxmlformats.org/drawingml/2006/main" xmlns:r="http://schemas.openxmlformats.org/officeDocument/2006/relationships" xmlns:p="http://schemas.openxmlformats.org/presentationml/2006/main">
   <p:cSld>
     <p:bg>
@@ -20664,7 +20342,7 @@
 </p:sld>
 </file>
 
-<file path=ppt/slides/slide35.xml><?xml version="1.0" encoding="utf-8"?>
+<file path=ppt/slides/slide34.xml><?xml version="1.0" encoding="utf-8"?>
 <p:sld xmlns:a="http://schemas.openxmlformats.org/drawingml/2006/main" xmlns:r="http://schemas.openxmlformats.org/officeDocument/2006/relationships" xmlns:p="http://schemas.openxmlformats.org/presentationml/2006/main">
   <p:cSld>
     <p:bg>
@@ -21435,7 +21113,7 @@
 </p:sld>
 </file>
 
-<file path=ppt/slides/slide36.xml><?xml version="1.0" encoding="utf-8"?>
+<file path=ppt/slides/slide35.xml><?xml version="1.0" encoding="utf-8"?>
 <p:sld xmlns:a="http://schemas.openxmlformats.org/drawingml/2006/main" xmlns:r="http://schemas.openxmlformats.org/officeDocument/2006/relationships" xmlns:p="http://schemas.openxmlformats.org/presentationml/2006/main">
   <p:cSld>
     <p:bg>
@@ -21639,513 +21317,7 @@
 </p:sld>
 </file>
 
-<file path=ppt/slides/slide37.xml><?xml version="1.0" encoding="utf-8"?>
-<p:sld xmlns:a="http://schemas.openxmlformats.org/drawingml/2006/main" xmlns:r="http://schemas.openxmlformats.org/officeDocument/2006/relationships" xmlns:p="http://schemas.openxmlformats.org/presentationml/2006/main">
-  <p:cSld>
-    <p:bg>
-      <p:bgPr>
-        <a:solidFill>
-          <a:srgbClr val="FCFCFB"/>
-        </a:solidFill>
-        <a:effectLst/>
-      </p:bgPr>
-    </p:bg>
-    <p:spTree>
-      <p:nvGrpSpPr>
-        <p:cNvPr id="1" name=""/>
-        <p:cNvGrpSpPr/>
-        <p:nvPr/>
-      </p:nvGrpSpPr>
-      <p:grpSpPr>
-        <a:xfrm>
-          <a:off x="0" y="0"/>
-          <a:ext cx="0" cy="0"/>
-          <a:chOff x="0" y="0"/>
-          <a:chExt cx="0" cy="0"/>
-        </a:xfrm>
-      </p:grpSpPr>
-      <p:sp>
-        <p:nvSpPr>
-          <p:cNvPr id="2" name="TextBox 1"/>
-          <p:cNvSpPr txBox="1"/>
-          <p:nvPr/>
-        </p:nvSpPr>
-        <p:spPr>
-          <a:xfrm>
-            <a:off x="502920" y="320040"/>
-            <a:ext cx="11155680" cy="822960"/>
-          </a:xfrm>
-          <a:prstGeom prst="rect">
-            <a:avLst/>
-          </a:prstGeom>
-          <a:noFill/>
-        </p:spPr>
-        <p:txBody>
-          <a:bodyPr wrap="square">
-            <a:spAutoFit/>
-          </a:bodyPr>
-          <a:lstStyle/>
-          <a:p>
-            <a:r>
-              <a:rPr sz="2900" b="1">
-                <a:solidFill>
-                  <a:srgbClr val="0B0B0B"/>
-                </a:solidFill>
-                <a:latin typeface="Calibri"/>
-              </a:rPr>
-              <a:t>Backup — Three Receiver Variants, Three Auth Interaction Models</a:t>
-            </a:r>
-          </a:p>
-        </p:txBody>
-      </p:sp>
-      <p:graphicFrame>
-        <p:nvGraphicFramePr>
-          <p:cNvPr id="3" name="Table 2"/>
-          <p:cNvGraphicFramePr>
-            <a:graphicFrameLocks noGrp="1"/>
-          </p:cNvGraphicFramePr>
-          <p:nvPr/>
-        </p:nvGraphicFramePr>
-        <p:xfrm>
-          <a:off x="685800" y="1691640"/>
-          <a:ext cx="11430000" cy="2011680"/>
-        </p:xfrm>
-        <a:graphic>
-          <a:graphicData uri="http://schemas.openxmlformats.org/drawingml/2006/table">
-            <a:tbl>
-              <a:tblPr firstRow="1" bandRow="1">
-                <a:tableStyleId>{5C22544A-7EE6-4342-B048-85BDC9FD1C3A}</a:tableStyleId>
-              </a:tblPr>
-              <a:tblGrid>
-                <a:gridCol w="2377440">
-                  <a:extLst>
-                    <a:ext uri="{9D8B030D-6E8A-4147-A177-3AD203B41FA5}">
-                      <a16:colId xmlns:a16="http://schemas.microsoft.com/office/drawing/2014/main" val="20000"/>
-                    </a:ext>
-                  </a:extLst>
-                </a:gridCol>
-                <a:gridCol w="2011680">
-                  <a:extLst>
-                    <a:ext uri="{9D8B030D-6E8A-4147-A177-3AD203B41FA5}">
-                      <a16:colId xmlns:a16="http://schemas.microsoft.com/office/drawing/2014/main" val="20001"/>
-                    </a:ext>
-                  </a:extLst>
-                </a:gridCol>
-                <a:gridCol w="7040880">
-                  <a:extLst>
-                    <a:ext uri="{9D8B030D-6E8A-4147-A177-3AD203B41FA5}">
-                      <a16:colId xmlns:a16="http://schemas.microsoft.com/office/drawing/2014/main" val="20002"/>
-                    </a:ext>
-                  </a:extLst>
-                </a:gridCol>
-              </a:tblGrid>
-              <a:tr h="502920">
-                <a:tc>
-                  <a:txBody>
-                    <a:bodyPr/>
-                    <a:lstStyle/>
-                    <a:p>
-                      <a:pPr algn="l"/>
-                      <a:r>
-                        <a:rPr sz="1350" b="1">
-                          <a:solidFill>
-                            <a:srgbClr val="FFFFFF"/>
-                          </a:solidFill>
-                          <a:latin typeface="Calibri"/>
-                        </a:rPr>
-                        <a:t>Binary</a:t>
-                      </a:r>
-                    </a:p>
-                  </a:txBody>
-                  <a:tcPr anchor="ctr">
-                    <a:solidFill>
-                      <a:srgbClr val="0B0B0B"/>
-                    </a:solidFill>
-                  </a:tcPr>
-                </a:tc>
-                <a:tc>
-                  <a:txBody>
-                    <a:bodyPr/>
-                    <a:lstStyle/>
-                    <a:p>
-                      <a:pPr algn="ctr"/>
-                      <a:r>
-                        <a:rPr sz="1350" b="1">
-                          <a:solidFill>
-                            <a:srgbClr val="FFFFFF"/>
-                          </a:solidFill>
-                          <a:latin typeface="Calibri"/>
-                        </a:rPr>
-                        <a:t>Role</a:t>
-                      </a:r>
-                    </a:p>
-                  </a:txBody>
-                  <a:tcPr anchor="ctr">
-                    <a:solidFill>
-                      <a:srgbClr val="0B0B0B"/>
-                    </a:solidFill>
-                  </a:tcPr>
-                </a:tc>
-                <a:tc>
-                  <a:txBody>
-                    <a:bodyPr/>
-                    <a:lstStyle/>
-                    <a:p>
-                      <a:pPr algn="ctr"/>
-                      <a:r>
-                        <a:rPr sz="1350" b="1">
-                          <a:solidFill>
-                            <a:srgbClr val="FFFFFF"/>
-                          </a:solidFill>
-                          <a:latin typeface="Calibri"/>
-                        </a:rPr>
-                        <a:t>Auth interaction</a:t>
-                      </a:r>
-                    </a:p>
-                  </a:txBody>
-                  <a:tcPr anchor="ctr">
-                    <a:solidFill>
-                      <a:srgbClr val="0B0B0B"/>
-                    </a:solidFill>
-                  </a:tcPr>
-                </a:tc>
-                <a:extLst>
-                  <a:ext uri="{0D108BD9-81ED-4DB2-BD59-A6C34878D82A}">
-                    <a16:rowId xmlns:a16="http://schemas.microsoft.com/office/drawing/2014/main" val="10000"/>
-                  </a:ext>
-                </a:extLst>
-              </a:tr>
-              <a:tr h="502920">
-                <a:tc>
-                  <a:txBody>
-                    <a:bodyPr/>
-                    <a:lstStyle/>
-                    <a:p>
-                      <a:pPr algn="l"/>
-                      <a:r>
-                        <a:rPr sz="1250" b="0">
-                          <a:solidFill>
-                            <a:srgbClr val="0B0B0B"/>
-                          </a:solidFill>
-                          <a:latin typeface="Calibri"/>
-                        </a:rPr>
-                        <a:t>keys_receiver</a:t>
-                      </a:r>
-                    </a:p>
-                  </a:txBody>
-                  <a:tcPr anchor="ctr">
-                    <a:solidFill>
-                      <a:srgbClr val="FFFFFF"/>
-                    </a:solidFill>
-                  </a:tcPr>
-                </a:tc>
-                <a:tc>
-                  <a:txBody>
-                    <a:bodyPr/>
-                    <a:lstStyle/>
-                    <a:p>
-                      <a:pPr algn="ctr"/>
-                      <a:r>
-                        <a:rPr sz="1250" b="0">
-                          <a:solidFill>
-                            <a:srgbClr val="0B0B0B"/>
-                          </a:solidFill>
-                          <a:latin typeface="Calibri"/>
-                        </a:rPr>
-                        <a:t>“The Manager”</a:t>
-                      </a:r>
-                    </a:p>
-                  </a:txBody>
-                  <a:tcPr anchor="ctr">
-                    <a:solidFill>
-                      <a:srgbClr val="FFFFFF"/>
-                    </a:solidFill>
-                  </a:tcPr>
-                </a:tc>
-                <a:tc>
-                  <a:txBody>
-                    <a:bodyPr/>
-                    <a:lstStyle/>
-                    <a:p>
-                      <a:pPr algn="ctr"/>
-                      <a:r>
-                        <a:rPr sz="1250" b="0">
-                          <a:solidFill>
-                            <a:srgbClr val="0B0B0B"/>
-                          </a:solidFill>
-                          <a:latin typeface="Calibri"/>
-                        </a:rPr>
-                        <a:t>Fetches a session key from Auth at startup, pushes it to the sender</a:t>
-                      </a:r>
-                    </a:p>
-                  </a:txBody>
-                  <a:tcPr anchor="ctr">
-                    <a:solidFill>
-                      <a:srgbClr val="FFFFFF"/>
-                    </a:solidFill>
-                  </a:tcPr>
-                </a:tc>
-                <a:extLst>
-                  <a:ext uri="{0D108BD9-81ED-4DB2-BD59-A6C34878D82A}">
-                    <a16:rowId xmlns:a16="http://schemas.microsoft.com/office/drawing/2014/main" val="10001"/>
-                  </a:ext>
-                </a:extLst>
-              </a:tr>
-              <a:tr h="502920">
-                <a:tc>
-                  <a:txBody>
-                    <a:bodyPr/>
-                    <a:lstStyle/>
-                    <a:p>
-                      <a:pPr algn="l"/>
-                      <a:r>
-                        <a:rPr sz="1250" b="0">
-                          <a:solidFill>
-                            <a:srgbClr val="0B0B0B"/>
-                          </a:solidFill>
-                          <a:latin typeface="Calibri"/>
-                        </a:rPr>
-                        <a:t>flash_receiver</a:t>
-                      </a:r>
-                    </a:p>
-                  </a:txBody>
-                  <a:tcPr anchor="ctr">
-                    <a:solidFill>
-                      <a:srgbClr val="F0EFEC"/>
-                    </a:solidFill>
-                  </a:tcPr>
-                </a:tc>
-                <a:tc>
-                  <a:txBody>
-                    <a:bodyPr/>
-                    <a:lstStyle/>
-                    <a:p>
-                      <a:pPr algn="ctr"/>
-                      <a:r>
-                        <a:rPr sz="1250" b="0">
-                          <a:solidFill>
-                            <a:srgbClr val="0B0B0B"/>
-                          </a:solidFill>
-                          <a:latin typeface="Calibri"/>
-                        </a:rPr>
-                        <a:t>Combined session app</a:t>
-                      </a:r>
-                    </a:p>
-                  </a:txBody>
-                  <a:tcPr anchor="ctr">
-                    <a:solidFill>
-                      <a:srgbClr val="F0EFEC"/>
-                    </a:solidFill>
-                  </a:tcPr>
-                </a:tc>
-                <a:tc>
-                  <a:txBody>
-                    <a:bodyPr/>
-                    <a:lstStyle/>
-                    <a:p>
-                      <a:pPr algn="ctr"/>
-                      <a:r>
-                        <a:rPr sz="1250" b="0">
-                          <a:solidFill>
-                            <a:srgbClr val="0B0B0B"/>
-                          </a:solidFill>
-                          <a:latin typeface="Calibri"/>
-                        </a:rPr>
-                        <a:t>Chat + file transfer + HMAC verification + key management, combined</a:t>
-                      </a:r>
-                    </a:p>
-                  </a:txBody>
-                  <a:tcPr anchor="ctr">
-                    <a:solidFill>
-                      <a:srgbClr val="F0EFEC"/>
-                    </a:solidFill>
-                  </a:tcPr>
-                </a:tc>
-                <a:extLst>
-                  <a:ext uri="{0D108BD9-81ED-4DB2-BD59-A6C34878D82A}">
-                    <a16:rowId xmlns:a16="http://schemas.microsoft.com/office/drawing/2014/main" val="10002"/>
-                  </a:ext>
-                </a:extLst>
-              </a:tr>
-              <a:tr h="502920">
-                <a:tc>
-                  <a:txBody>
-                    <a:bodyPr/>
-                    <a:lstStyle/>
-                    <a:p>
-                      <a:pPr algn="l"/>
-                      <a:r>
-                        <a:rPr sz="1250" b="0">
-                          <a:solidFill>
-                            <a:srgbClr val="0B0B0B"/>
-                          </a:solidFill>
-                          <a:latin typeface="Calibri"/>
-                        </a:rPr>
-                        <a:t>ask_receiver</a:t>
-                      </a:r>
-                    </a:p>
-                  </a:txBody>
-                  <a:tcPr anchor="ctr">
-                    <a:solidFill>
-                      <a:srgbClr val="FFFFFF"/>
-                    </a:solidFill>
-                  </a:tcPr>
-                </a:tc>
-                <a:tc>
-                  <a:txBody>
-                    <a:bodyPr/>
-                    <a:lstStyle/>
-                    <a:p>
-                      <a:pPr algn="ctr"/>
-                      <a:r>
-                        <a:rPr sz="1250" b="0">
-                          <a:solidFill>
-                            <a:srgbClr val="0B0B0B"/>
-                          </a:solidFill>
-                          <a:latin typeface="Calibri"/>
-                        </a:rPr>
-                        <a:t>“The Detective”</a:t>
-                      </a:r>
-                    </a:p>
-                  </a:txBody>
-                  <a:tcPr anchor="ctr">
-                    <a:solidFill>
-                      <a:srgbClr val="FFFFFF"/>
-                    </a:solidFill>
-                  </a:tcPr>
-                </a:tc>
-                <a:tc>
-                  <a:txBody>
-                    <a:bodyPr/>
-                    <a:lstStyle/>
-                    <a:p>
-                      <a:pPr algn="ctr"/>
-                      <a:r>
-                        <a:rPr sz="1250" b="0">
-                          <a:solidFill>
-                            <a:srgbClr val="0B0B0B"/>
-                          </a:solidFill>
-                          <a:latin typeface="Calibri"/>
-                        </a:rPr>
-                        <a:t>No keys at start — listens for an optical key-ID broadcast, then queries Auth</a:t>
-                      </a:r>
-                    </a:p>
-                  </a:txBody>
-                  <a:tcPr anchor="ctr">
-                    <a:solidFill>
-                      <a:srgbClr val="FFFFFF"/>
-                    </a:solidFill>
-                  </a:tcPr>
-                </a:tc>
-                <a:extLst>
-                  <a:ext uri="{0D108BD9-81ED-4DB2-BD59-A6C34878D82A}">
-                    <a16:rowId xmlns:a16="http://schemas.microsoft.com/office/drawing/2014/main" val="10003"/>
-                  </a:ext>
-                </a:extLst>
-              </a:tr>
-            </a:tbl>
-          </a:graphicData>
-        </a:graphic>
-      </p:graphicFrame>
-      <p:sp>
-        <p:nvSpPr>
-          <p:cNvPr id="4" name="TextBox 3"/>
-          <p:cNvSpPr txBox="1"/>
-          <p:nvPr/>
-        </p:nvSpPr>
-        <p:spPr>
-          <a:xfrm>
-            <a:off x="502920" y="3931920"/>
-            <a:ext cx="11155680" cy="548640"/>
-          </a:xfrm>
-          <a:prstGeom prst="rect">
-            <a:avLst/>
-          </a:prstGeom>
-          <a:noFill/>
-        </p:spPr>
-        <p:txBody>
-          <a:bodyPr wrap="square">
-            <a:spAutoFit/>
-          </a:bodyPr>
-          <a:lstStyle/>
-          <a:p>
-            <a:pPr algn="ctr"/>
-            <a:r>
-              <a:rPr sz="1250" b="1" i="0">
-                <a:solidFill>
-                  <a:srgbClr val="898781"/>
-                </a:solidFill>
-                <a:latin typeface="Calibri"/>
-              </a:rPr>
-              <a:t>ask_receiver implements the roaming/discovery model shown on the Auth-runtime slide — it is the concrete code behind that diagram, not a conceptual simplification.</a:t>
-            </a:r>
-          </a:p>
-        </p:txBody>
-      </p:sp>
-      <p:sp>
-        <p:nvSpPr>
-          <p:cNvPr id="5" name="TextBox 4"/>
-          <p:cNvSpPr txBox="1"/>
-          <p:nvPr/>
-        </p:nvSpPr>
-        <p:spPr>
-          <a:xfrm>
-            <a:off x="685800" y="4617720"/>
-            <a:ext cx="10789920" cy="1828800"/>
-          </a:xfrm>
-          <a:prstGeom prst="rect">
-            <a:avLst/>
-          </a:prstGeom>
-          <a:noFill/>
-        </p:spPr>
-        <p:txBody>
-          <a:bodyPr wrap="square">
-            <a:spAutoFit/>
-          </a:bodyPr>
-          <a:lstStyle/>
-          <a:p>
-            <a:pPr>
-              <a:spcAft>
-                <a:spcPts val="1100"/>
-              </a:spcAft>
-            </a:pPr>
-            <a:r>
-              <a:rPr sz="1350">
-                <a:solidFill>
-                  <a:srgbClr val="0B0B0B"/>
-                </a:solidFill>
-                <a:latin typeface="Calibri"/>
-              </a:rPr>
-              <a:t>●   Message types relevant to Auth interaction: MSG_TYPE_KEY_ID_ONLY (discovery), MSG_TYPE_CHALLENGE / RESPONSE (runtime HMAC), MSG_TYPE_KEY (provisioning push)</a:t>
-            </a:r>
-          </a:p>
-          <a:p>
-            <a:pPr>
-              <a:spcAft>
-                <a:spcPts val="1100"/>
-              </a:spcAft>
-            </a:pPr>
-            <a:r>
-              <a:rPr sz="1350">
-                <a:solidFill>
-                  <a:srgbClr val="0B0B0B"/>
-                </a:solidFill>
-                <a:latin typeface="Calibri"/>
-              </a:rPr>
-              <a:t>●   All three variants share the same SST C API calls underneath: init_SST(), get_session_key(), get_session_key_by_ID()</a:t>
-            </a:r>
-          </a:p>
-        </p:txBody>
-      </p:sp>
-    </p:spTree>
-  </p:cSld>
-  <p:clrMapOvr>
-    <a:masterClrMapping/>
-  </p:clrMapOvr>
-</p:sld>
-</file>
-
-<file path=ppt/slides/slide38.xml><?xml version="1.0" encoding="utf-8"?>
+<file path=ppt/slides/slide36.xml><?xml version="1.0" encoding="utf-8"?>
 <p:sld xmlns:a="http://schemas.openxmlformats.org/drawingml/2006/main" xmlns:r="http://schemas.openxmlformats.org/officeDocument/2006/relationships" xmlns:p="http://schemas.openxmlformats.org/presentationml/2006/main">
   <p:cSld>
     <p:bg>

--- a/thesis_defense/lifi_thesis_defense.pptx
+++ b/thesis_defense/lifi_thesis_defense.pptx
@@ -1481,7 +1481,7 @@
           <a:lstStyle/>
           <a:p>
             <a:r>
-              <a:t>This closes the loop back to the Security Goals G1-G4 scorecard slide, now with evidence in the last column instead of just mechanism. Read it goal by goal, evidence-first: this is the moment to sound confident, because everything in the 'evidence' column is a number you already showed them on the previous four slides — you're not introducing anything new here, just tying it together.</a:t>
+              <a:t>This closes the loop back to the Security Goals G1-G4 scorecard slide, now with evidence in the last column instead of just mechanism. Read it goal by goal, evidence-first: this is the moment to sound confident, because everything in the 'evidence' column is a number you already showed them on the Methodology, G4, Δ-sensitivity, and G2 slides earlier in this section — you're not introducing anything new here, just tying it together.</a:t>
             </a:r>
           </a:p>
         </p:txBody>
@@ -15622,15 +15622,8 @@
                     <a:bodyPr/>
                     <a:lstStyle/>
                     <a:p>
-                      <a:pPr algn="ctr"/>
                       <a:r>
-                        <a:rPr sz="1250" b="0">
-                          <a:solidFill>
-                            <a:srgbClr val="0B0B0B"/>
-                          </a:solidFill>
-                          <a:latin typeface="Calibri"/>
-                        </a:rPr>
-                        <a:t>15.11s ± 0.06s intrinsic ≈ Δ + 0.11s</a:t>
+                        <a:t>15.001s ± 0.000s on-device (n=25), confirms Δ + fixed overhead</a:t>
                       </a:r>
                     </a:p>
                   </a:txBody>
@@ -15721,15 +15714,8 @@
                     <a:bodyPr/>
                     <a:lstStyle/>
                     <a:p>
-                      <a:pPr algn="ctr"/>
                       <a:r>
-                        <a:rPr sz="1250" b="0">
-                          <a:solidFill>
-                            <a:srgbClr val="0B0B0B"/>
-                          </a:solidFill>
-                          <a:latin typeface="Calibri"/>
-                        </a:rPr>
-                        <a:t>Immediate rejection confirmed; window-bounded (documented)</a:t>
+                        <a:t>25/25 immediate rejection; window-bound limitation reproduced 25/25</a:t>
                       </a:r>
                     </a:p>
                   </a:txBody>

--- a/thesis_defense/lifi_thesis_defense.pptx
+++ b/thesis_defense/lifi_thesis_defense.pptx
@@ -612,7 +612,7 @@
           <a:lstStyle/>
           <a:p>
             <a:r>
-              <a:t>This is the thesis statement slide. Say directly: the literature has information-theoretic secrecy, physical-layer key generation, encrypted VLC pipes, and commercial one-time-auth products — but nothing that continuously binds authorization to ongoing optical presence with automatic revocation. Then introduce G1 through G4 as the four goals the rest of the talk is structured around — you'll come back to this exact list on the security-goals table slide.</a:t>
+              <a:t>This is the general LiFi-Auth protocol model, not a description of the evaluated two-Pico prototype — say that distinction out loud before walking the five steps, the same way the System Architecture slide grays out the on-device path to separate model from implementation. Walk the five steps as the formal round: beacon broadcast, forwarding to Auth, Auth's freshness/origin check, credential issuance, and continuous re-attestation. Then bridge explicitly: the deployed receiver_pico firmware collapses steps 2-4 into a local decision — it verifies the GCM tag and nonce window itself and runs its own Δ timer (presence_check_decay()), with no Auth round-trip per frame and no room-scoped session credential reissued per interval. If asked why present the network-mediated model at all: it's the general framing the security goals (G1-G4) are stated against, and it's also the model the G3 distance-bounding formalization (later slide) builds on.</a:t>
             </a:r>
           </a:p>
         </p:txBody>
@@ -1050,7 +1050,7 @@
           <a:lstStyle/>
           <a:p>
             <a:r>
-              <a:t>Open with the RF problem in one sentence: propagation is the enemy of physical-boundary security. Then pivot to LEDs — they're everywhere already, and the communicative potential is untapped. Land on the physics point: light is confined by construction. That's the one sentence you want the committee to remember from this slide.</a:t>
+              <a:t>This is the agenda — move through it quickly, in well under thirty seconds, don't narrate each line individually. State the shape of the talk once: background and motivation first, then the gap in existing work, then the system as built (architecture through implementation), then evaluation carries most of the weight — that's where the measured data lives — before wrapping with discussion, limitations, and future work.</a:t>
             </a:r>
           </a:p>
         </p:txBody>
@@ -1271,7 +1271,7 @@
           <a:lstStyle/>
           <a:p>
             <a:r>
-              <a:t>This is the thesis statement slide. Say directly: the literature has information-theoretic secrecy, physical-layer key generation, encrypted VLC pipes, and commercial one-time-auth products — but nothing that continuously binds authorization to ongoing optical presence with automatic revocation. Then introduce G1 through G4 as the four goals the rest of the talk is structured around — you'll come back to this exact list on the security-goals table slide.</a:t>
+              <a:t>This is the formal channel and coverage model — introduce it as the semi-formal treatment standing in for a full symbolic proof (the backup slide on why Tamarin/ProVerif wasn't attempted has the full reasoning, if asked). Walk the Lambertian emission order and DC channel gain as standard optical-wireless results — cite Kahn &amp; Barry and Komine &amp; Nakagawa — not something original to this work; the authorization-region predicate built on top of them is. Be upfront about R and θ: they're physical constants of this deployment that haven't been independently measured on the bench, so the model gives the shape of the authorized region, not yet its exact measured size — name that as future work rather than letting the clean geometry imply more precision than exists. This slide sets up the next one, where the same formal apparatus states the G3 condition precisely.</a:t>
             </a:r>
           </a:p>
         </p:txBody>
@@ -1341,7 +1341,7 @@
           <a:lstStyle/>
           <a:p>
             <a:r>
-              <a:t>This is the thesis statement slide. Say directly: the literature has information-theoretic secrecy, physical-layer key generation, encrypted VLC pipes, and commercial one-time-auth products — but nothing that continuously binds authorization to ongoing optical presence with automatic revocation. Then introduce G1 through G4 as the four goals the rest of the talk is structured around — you'll come back to this exact list on the security-goals table slide.</a:t>
+              <a:t>This slide formalizes exactly why G3 stands or falls on one inequality — say up front that this is the formal condition for G3, not a description of what the deployed receiver does today. Walk the RTT distance bound first, and flag immediately that at Pico-class timing resolution it's a latency bound, not a true distance bound — don't overclaim precision. On the acceptance predicate: be explicit that the MAC/freshness/replay terms are what the receiver checks today (matches the Security Goals table's G1/G2 'Achieved' rows); RTT ≤ Δ is the not-yet-implemented G3 extension, not part of the deployed acceptance logic — say this out loud, don't let the equation read as a claim about current behavior. Then the G3 condition, Δ &lt; L_relay: decode-and-forward relays (200-500ms) would be caught by a small enough Δ if the timing check existed; amplify-and-forward relays drive latency toward zero and are undetectable by any timing bound at all, which is why the bounded illumination cone from the previous slide — not a timing check — is the piece actually doing work today. Land on the pair framing accurately: the cone already limits physical reach; timing is the piece that would close the remaining digital-relay gap if it were implemented.</a:t>
             </a:r>
           </a:p>
         </p:txBody>
@@ -1779,7 +1779,7 @@
           <a:lstStyle/>
           <a:p>
             <a:r>
-              <a:t>Closing content slide before thank-you. Keep this tight and confident — every bullet here is something you already showed evidence for earlier in the talk, so this should feel like a summary, not a new argument. The last two bullets are there on purpose: naming exactly what wasn't done, right next to what was, is itself part of the contribution.</a:t>
+              <a:t>Standard bibliography slide — no need to narrate it. Pull it up only if a committee member asks for a specific citation; otherwise move straight through to Thank You.</a:t>
             </a:r>
           </a:p>
         </p:txBody>
@@ -1878,7 +1878,7 @@
           <a:lstStyle/>
           <a:p>
             <a:r>
-              <a:t>Open with the RF problem in one sentence: propagation is the enemy of physical-boundary security. Then pivot to LEDs — they're everywhere already, and the communicative potential is untapped. Land on the physics point: light is confined by construction. That's the one sentence you want the committee to remember from this slide.</a:t>
+              <a:t>Establish the basics before anything else: LiFi carries data on light instead of radio, using on-off keying at frequencies far faster than the eye can perceive, so the LED still reads as steady illumination. The confinement line is the one to land on explicitly — light stops at the room boundary, unlike RF — because that's the physical property the rest of the talk builds its security argument on. Note that it's a line-of-sight link, LED downlink and photodiode uplink, and that IEEE 802.11bb (ratified June 2023) means this is a standardized PHY with real measured bandwidth (10 Mb/s to 9.6 Gb/s) behind it, not a one-off research channel.</a:t>
             </a:r>
           </a:p>
         </p:txBody>
@@ -2467,7 +2467,7 @@
           <a:lstStyle/>
           <a:p>
             <a:r>
-              <a:t>Open with the RF problem in one sentence: propagation is the enemy of physical-boundary security. Then pivot to LEDs — they're everywhere already, and the communicative potential is untapped. Land on the physics point: light is confined by construction. That's the one sentence you want the committee to remember from this slide.</a:t>
+              <a:t>This slide sets the geometric assumptions the rest of the security argument leans on. Walk the LOS-vs-NLOS distinction — link strength depends on which path dominates — and then the receiver's field of view: outside that cone, there is no signal, full stop. Both LED and photodiode orientation matter, not just distance, which is why 'optical presence' is a geometric claim, not just a proximity claim. Land on the last line explicitly: this geometry is what shapes the trust and access-control assumptions in the System Architecture and Threat Model slides that follow.</a:t>
             </a:r>
           </a:p>
         </p:txBody>
@@ -10886,7 +10886,7 @@
                 </a:solidFill>
                 <a:latin typeface="Calibri"/>
               </a:rPr>
-              <a:t>One authorization round: what crosses the optical link, what crosses the network, and what Auth decides.</a:t>
+              <a:t>One authorization round in the general LiFi-Auth model — the evaluated two-Pico prototype makes this decision locally, on-device, with no network round-trip per frame (see System Architecture).</a:t>
             </a:r>
           </a:p>
         </p:txBody>
@@ -12320,7 +12320,7 @@
                 </a:solidFill>
                 <a:latin typeface="Calibri"/>
               </a:rPr>
-              <a:t>●   Freshness, revocation-latency, and replay-boundary results were measured on the debug receiver (receiver_pico/src/main.c)</a:t>
+              <a:t>●   Freshness, revocation-latency, and replay-boundary results were measured on the receiver firmware (receiver_pico/src/main.c)</a:t>
             </a:r>
           </a:p>
           <a:p>
@@ -14692,7 +14692,7 @@
                 </a:solidFill>
                 <a:latin typeface="Calibri"/>
               </a:rPr>
-              <a:t>What the system actually decides — and the exact inequality on which G3 stands or falls.</a:t>
+              <a:t>What full G3 enforcement would require — and the exact inequality on which G3 stands or falls.</a:t>
             </a:r>
           </a:p>
         </p:txBody>
@@ -14789,7 +14789,7 @@
                 </a:solidFill>
                 <a:latin typeface="Calibri"/>
               </a:rPr>
-              <a:t>Acceptance predicate as implemented</a:t>
+              <a:t>Acceptance predicate — G1/G2 terms as implemented; RTT ≤ Δ is the proposed G3 extension, not yet implemented</a:t>
             </a:r>
           </a:p>
           <a:p>
@@ -14880,7 +14880,7 @@
                 </a:solidFill>
                 <a:latin typeface="Calibri"/>
               </a:rPr>
-              <a:t>Why the two defenses are a pair, not a redundancy</a:t>
+              <a:t>Why the two defenses would be a pair, not a redundancy</a:t>
             </a:r>
           </a:p>
           <a:p>
@@ -14897,7 +14897,7 @@
                 </a:solidFill>
                 <a:latin typeface="Calibri"/>
               </a:rPr>
-              <a:t>Timing (Δ) closes the digital-relay path; the bounded cone V closes the physical-reach path. Neither is sufficient alone.</a:t>
+              <a:t>Timing (Δ), if implemented, would close the digital-relay path; the bounded cone V already closes the physical-reach path today. Neither alone would be sufficient.</a:t>
             </a:r>
           </a:p>
           <a:p>
